--- a/presentations/03_CenGeometry_Expert_Recommendations.pptx
+++ b/presentations/03_CenGeometry_Expert_Recommendations.pptx
@@ -3112,7 +3112,7 @@
                           <a:ea typeface="Calibri" pitchFamily="34" charset="-122"/>
                           <a:cs typeface="Calibri" pitchFamily="34" charset="-120"/>
                         </a:rPr>
-                        <a:t>Turns OK / HARD / FORBIDDEN from reasoned guesses into measured tolerances. The observed particle-to-particle spread IS the OK band.</a:t>
+                        <a:t>Turns OK / HARD / SEVERE from reasoned guesses into measured tolerances. The observed particle-to-particle spread IS the OK band.</a:t>
                       </a:r>
                       <a:endParaRPr lang="en-US" sz="1250" dirty="0">
                         <a:latin typeface="Calibri" charset="0"/>

--- a/presentations/03_CenGeometry_Expert_Recommendations.pptx
+++ b/presentations/03_CenGeometry_Expert_Recommendations.pptx
@@ -12,9 +12,10 @@
     <p:sldId id="260" r:id="rId6"/>
     <p:sldId id="261" r:id="rId7"/>
     <p:sldId id="262" r:id="rId8"/>
+    <p:sldId id="263" r:id="rId9"/>
   </p:sldIdLst>
   <p:notesMasterIdLst>
-    <p:notesMasterId r:id="rId9"/>
+    <p:notesMasterId r:id="rId10"/>
   </p:notesMasterIdLst>
   <p:sldSz cx="12192000" cy="6858000"/>
   <p:notesSz cx="6858000" cy="12192000"/>
@@ -1060,6 +1061,94 @@
             <a:fld id="{F7021451-1387-4CA6-816F-3879F97B5CBC}" type="slidenum">
               <a:rPr lang="en-US"/>
               <a:t>7</a:t>
+            </a:fld>
+            <a:endParaRPr lang="en-US"/>
+          </a:p>
+        </p:txBody>
+      </p:sp>
+    </p:spTree>
+    <p:extLst>
+      <p:ext uri="{BB962C8B-B14F-4D97-AF65-F5344CB8AC3E}">
+        <p14:creationId xmlns:p14="http://schemas.microsoft.com/office/powerpoint/2010/main" val="1024086991"/>
+      </p:ext>
+    </p:extLst>
+  </p:cSld>
+  <p:clrMapOvr>
+    <a:masterClrMapping/>
+  </p:clrMapOvr>
+</p:notes>
+</file>
+
+<file path=ppt/notesSlides/notesSlide8.xml><?xml version="1.0" encoding="utf-8"?>
+<p:notes xmlns:a="http://schemas.openxmlformats.org/drawingml/2006/main" xmlns:r="http://schemas.openxmlformats.org/officeDocument/2006/relationships" xmlns:p="http://schemas.openxmlformats.org/presentationml/2006/main">
+  <p:cSld>
+    <p:spTree>
+      <p:nvGrpSpPr>
+        <p:cNvPr id="1" name=""/>
+        <p:cNvGrpSpPr/>
+        <p:nvPr/>
+      </p:nvGrpSpPr>
+      <p:grpSpPr>
+        <a:xfrm>
+          <a:off x="0" y="0"/>
+          <a:ext cx="0" cy="0"/>
+          <a:chOff x="0" y="0"/>
+          <a:chExt cx="0" cy="0"/>
+        </a:xfrm>
+      </p:grpSpPr>
+      <p:sp>
+        <p:nvSpPr>
+          <p:cNvPr id="2" name="Slide Image Placeholder 1"/>
+          <p:cNvSpPr>
+            <a:spLocks noGrp="1" noRot="1" noChangeAspect="1"/>
+          </p:cNvSpPr>
+          <p:nvPr>
+            <p:ph type="sldImg"/>
+          </p:nvPr>
+        </p:nvSpPr>
+        <p:spPr/>
+      </p:sp>
+      <p:sp>
+        <p:nvSpPr>
+          <p:cNvPr id="3" name="Notes Placeholder 2"/>
+          <p:cNvSpPr>
+            <a:spLocks noGrp="1"/>
+          </p:cNvSpPr>
+          <p:nvPr>
+            <p:ph type="body" idx="1"/>
+          </p:nvPr>
+        </p:nvSpPr>
+        <p:spPr/>
+        <p:txBody>
+          <a:bodyPr/>
+          <a:lstStyle/>
+          <a:p>
+            <a:r>
+              <a:rPr lang="en-US" dirty="0"/>
+              <a:t/>
+            </a:r>
+            <a:endParaRPr lang="en-US" dirty="0"/>
+          </a:p>
+        </p:txBody>
+      </p:sp>
+      <p:sp>
+        <p:nvSpPr>
+          <p:cNvPr id="4" name="Slide Number Placeholder 3"/>
+          <p:cNvSpPr>
+            <a:spLocks noGrp="1"/>
+          </p:cNvSpPr>
+          <p:nvPr>
+            <p:ph type="sldNum" sz="quarter" idx="10"/>
+          </p:nvPr>
+        </p:nvSpPr>
+        <p:spPr/>
+        <p:txBody>
+          <a:bodyPr/>
+          <a:lstStyle/>
+          <a:p>
+            <a:fld id="{F7021451-1387-4CA6-816F-3879F97B5CBC}" type="slidenum">
+              <a:rPr lang="en-US"/>
+              <a:t>8</a:t>
             </a:fld>
             <a:endParaRPr lang="en-US"/>
           </a:p>
@@ -1537,7 +1626,7 @@
                 <a:ea typeface="Calibri" pitchFamily="34" charset="-122"/>
                 <a:cs typeface="Calibri" pitchFamily="34" charset="-120"/>
               </a:rPr>
-              <a:t>Prioritised improvements, published knowledge worth building in, and five testable predictions</a:t>
+              <a:t>Prioritised improvements, published knowledge worth building in, and six testable predictions</a:t>
             </a:r>
             <a:endParaRPr lang="en-US" sz="1800" dirty="0"/>
           </a:p>
@@ -4030,6 +4119,268 @@
                           <a:ea typeface="Calibri" pitchFamily="34" charset="-122"/>
                           <a:cs typeface="Calibri" pitchFamily="34" charset="-120"/>
                         </a:rPr>
+                        <a:t>5b</a:t>
+                      </a:r>
+                      <a:endParaRPr lang="en-US" sz="1250" dirty="0">
+                        <a:latin typeface="Calibri" charset="0"/>
+                        <a:ea typeface="Calibri" charset="0"/>
+                        <a:cs typeface="Calibri" charset="0"/>
+                      </a:endParaRPr>
+                    </a:p>
+                  </a:txBody>
+                  <a:tcPr marL="91440" marR="91440" marT="45720" marB="45720" anchor="ctr">
+                    <a:lnL w="12700" cap="flat" cmpd="sng" algn="ctr">
+                      <a:solidFill>
+                        <a:srgbClr val="E3E0EC"/>
+                      </a:solidFill>
+                      <a:prstDash val="solid"/>
+                      <a:round/>
+                      <a:headEnd type="none" w="med" len="med"/>
+                      <a:tailEnd type="none" w="med" len="med"/>
+                    </a:lnL>
+                    <a:lnR w="12700" cap="flat" cmpd="sng" algn="ctr">
+                      <a:solidFill>
+                        <a:srgbClr val="E3E0EC"/>
+                      </a:solidFill>
+                      <a:prstDash val="solid"/>
+                      <a:round/>
+                      <a:headEnd type="none" w="med" len="med"/>
+                      <a:tailEnd type="none" w="med" len="med"/>
+                    </a:lnR>
+                    <a:lnT w="12700" cap="flat" cmpd="sng" algn="ctr">
+                      <a:solidFill>
+                        <a:srgbClr val="E3E0EC"/>
+                      </a:solidFill>
+                      <a:prstDash val="solid"/>
+                      <a:round/>
+                      <a:headEnd type="none" w="med" len="med"/>
+                      <a:tailEnd type="none" w="med" len="med"/>
+                    </a:lnT>
+                    <a:lnB w="12700" cap="flat" cmpd="sng" algn="ctr">
+                      <a:solidFill>
+                        <a:srgbClr val="E3E0EC"/>
+                      </a:solidFill>
+                      <a:prstDash val="solid"/>
+                      <a:round/>
+                      <a:headEnd type="none" w="med" len="med"/>
+                      <a:tailEnd type="none" w="med" len="med"/>
+                    </a:lnB>
+                  </a:tcPr>
+                </a:tc>
+                <a:tc>
+                  <a:txBody>
+                    <a:bodyPr/>
+                    <a:lstStyle/>
+                    <a:p>
+                      <a:pPr indent="0" marL="0">
+                        <a:buNone/>
+                      </a:pPr>
+                      <a:r>
+                        <a:rPr lang="en-US" sz="1250" dirty="0">
+                          <a:solidFill>
+                            <a:srgbClr val="000000"/>
+                          </a:solidFill>
+                          <a:latin typeface="Calibri" pitchFamily="34" charset="0"/>
+                          <a:ea typeface="Calibri" pitchFamily="34" charset="-122"/>
+                          <a:cs typeface="Calibri" pitchFamily="34" charset="-120"/>
+                        </a:rPr>
+                        <a:t>Report every conclusion both ways</a:t>
+                      </a:r>
+                      <a:endParaRPr lang="en-US" sz="1250" dirty="0">
+                        <a:latin typeface="Calibri" charset="0"/>
+                        <a:ea typeface="Calibri" charset="0"/>
+                        <a:cs typeface="Calibri" charset="0"/>
+                      </a:endParaRPr>
+                    </a:p>
+                  </a:txBody>
+                  <a:tcPr marL="91440" marR="91440" marT="45720" marB="45720" anchor="ctr">
+                    <a:lnL w="12700" cap="flat" cmpd="sng" algn="ctr">
+                      <a:solidFill>
+                        <a:srgbClr val="E3E0EC"/>
+                      </a:solidFill>
+                      <a:prstDash val="solid"/>
+                      <a:round/>
+                      <a:headEnd type="none" w="med" len="med"/>
+                      <a:tailEnd type="none" w="med" len="med"/>
+                    </a:lnL>
+                    <a:lnR w="12700" cap="flat" cmpd="sng" algn="ctr">
+                      <a:solidFill>
+                        <a:srgbClr val="E3E0EC"/>
+                      </a:solidFill>
+                      <a:prstDash val="solid"/>
+                      <a:round/>
+                      <a:headEnd type="none" w="med" len="med"/>
+                      <a:tailEnd type="none" w="med" len="med"/>
+                    </a:lnR>
+                    <a:lnT w="12700" cap="flat" cmpd="sng" algn="ctr">
+                      <a:solidFill>
+                        <a:srgbClr val="E3E0EC"/>
+                      </a:solidFill>
+                      <a:prstDash val="solid"/>
+                      <a:round/>
+                      <a:headEnd type="none" w="med" len="med"/>
+                      <a:tailEnd type="none" w="med" len="med"/>
+                    </a:lnT>
+                    <a:lnB w="12700" cap="flat" cmpd="sng" algn="ctr">
+                      <a:solidFill>
+                        <a:srgbClr val="E3E0EC"/>
+                      </a:solidFill>
+                      <a:prstDash val="solid"/>
+                      <a:round/>
+                      <a:headEnd type="none" w="med" len="med"/>
+                      <a:tailEnd type="none" w="med" len="med"/>
+                    </a:lnB>
+                  </a:tcPr>
+                </a:tc>
+                <a:tc>
+                  <a:txBody>
+                    <a:bodyPr/>
+                    <a:lstStyle/>
+                    <a:p>
+                      <a:pPr indent="0" marL="0">
+                        <a:buNone/>
+                      </a:pPr>
+                      <a:r>
+                        <a:rPr lang="en-US" sz="1250" dirty="0">
+                          <a:solidFill>
+                            <a:srgbClr val="000000"/>
+                          </a:solidFill>
+                          <a:latin typeface="Calibri" pitchFamily="34" charset="0"/>
+                          <a:ea typeface="Calibri" pitchFamily="34" charset="-122"/>
+                          <a:cs typeface="Calibri" pitchFamily="34" charset="-120"/>
+                        </a:rPr>
+                        <a:t>The spoke-pivot switch already exists. Any result that flips when the spoke is held radial is being carried by that assumption, not by the data. Free to run.</a:t>
+                      </a:r>
+                      <a:endParaRPr lang="en-US" sz="1250" dirty="0">
+                        <a:latin typeface="Calibri" charset="0"/>
+                        <a:ea typeface="Calibri" charset="0"/>
+                        <a:cs typeface="Calibri" charset="0"/>
+                      </a:endParaRPr>
+                    </a:p>
+                  </a:txBody>
+                  <a:tcPr marL="91440" marR="91440" marT="45720" marB="45720" anchor="ctr">
+                    <a:lnL w="12700" cap="flat" cmpd="sng" algn="ctr">
+                      <a:solidFill>
+                        <a:srgbClr val="E3E0EC"/>
+                      </a:solidFill>
+                      <a:prstDash val="solid"/>
+                      <a:round/>
+                      <a:headEnd type="none" w="med" len="med"/>
+                      <a:tailEnd type="none" w="med" len="med"/>
+                    </a:lnL>
+                    <a:lnR w="12700" cap="flat" cmpd="sng" algn="ctr">
+                      <a:solidFill>
+                        <a:srgbClr val="E3E0EC"/>
+                      </a:solidFill>
+                      <a:prstDash val="solid"/>
+                      <a:round/>
+                      <a:headEnd type="none" w="med" len="med"/>
+                      <a:tailEnd type="none" w="med" len="med"/>
+                    </a:lnR>
+                    <a:lnT w="12700" cap="flat" cmpd="sng" algn="ctr">
+                      <a:solidFill>
+                        <a:srgbClr val="E3E0EC"/>
+                      </a:solidFill>
+                      <a:prstDash val="solid"/>
+                      <a:round/>
+                      <a:headEnd type="none" w="med" len="med"/>
+                      <a:tailEnd type="none" w="med" len="med"/>
+                    </a:lnT>
+                    <a:lnB w="12700" cap="flat" cmpd="sng" algn="ctr">
+                      <a:solidFill>
+                        <a:srgbClr val="E3E0EC"/>
+                      </a:solidFill>
+                      <a:prstDash val="solid"/>
+                      <a:round/>
+                      <a:headEnd type="none" w="med" len="med"/>
+                      <a:tailEnd type="none" w="med" len="med"/>
+                    </a:lnB>
+                  </a:tcPr>
+                </a:tc>
+                <a:tc>
+                  <a:txBody>
+                    <a:bodyPr/>
+                    <a:lstStyle/>
+                    <a:p>
+                      <a:pPr indent="0" marL="0">
+                        <a:buNone/>
+                      </a:pPr>
+                      <a:r>
+                        <a:rPr lang="en-US" sz="1250" dirty="0">
+                          <a:solidFill>
+                            <a:srgbClr val="000000"/>
+                          </a:solidFill>
+                          <a:latin typeface="Calibri" pitchFamily="34" charset="0"/>
+                          <a:ea typeface="Calibri" pitchFamily="34" charset="-122"/>
+                          <a:cs typeface="Calibri" pitchFamily="34" charset="-120"/>
+                        </a:rPr>
+                        <a:t>Low</a:t>
+                      </a:r>
+                      <a:endParaRPr lang="en-US" sz="1250" dirty="0">
+                        <a:latin typeface="Calibri" charset="0"/>
+                        <a:ea typeface="Calibri" charset="0"/>
+                        <a:cs typeface="Calibri" charset="0"/>
+                      </a:endParaRPr>
+                    </a:p>
+                  </a:txBody>
+                  <a:tcPr marL="91440" marR="91440" marT="45720" marB="45720" anchor="ctr">
+                    <a:lnL w="12700" cap="flat" cmpd="sng" algn="ctr">
+                      <a:solidFill>
+                        <a:srgbClr val="E3E0EC"/>
+                      </a:solidFill>
+                      <a:prstDash val="solid"/>
+                      <a:round/>
+                      <a:headEnd type="none" w="med" len="med"/>
+                      <a:tailEnd type="none" w="med" len="med"/>
+                    </a:lnL>
+                    <a:lnR w="12700" cap="flat" cmpd="sng" algn="ctr">
+                      <a:solidFill>
+                        <a:srgbClr val="E3E0EC"/>
+                      </a:solidFill>
+                      <a:prstDash val="solid"/>
+                      <a:round/>
+                      <a:headEnd type="none" w="med" len="med"/>
+                      <a:tailEnd type="none" w="med" len="med"/>
+                    </a:lnR>
+                    <a:lnT w="12700" cap="flat" cmpd="sng" algn="ctr">
+                      <a:solidFill>
+                        <a:srgbClr val="E3E0EC"/>
+                      </a:solidFill>
+                      <a:prstDash val="solid"/>
+                      <a:round/>
+                      <a:headEnd type="none" w="med" len="med"/>
+                      <a:tailEnd type="none" w="med" len="med"/>
+                    </a:lnT>
+                    <a:lnB w="12700" cap="flat" cmpd="sng" algn="ctr">
+                      <a:solidFill>
+                        <a:srgbClr val="E3E0EC"/>
+                      </a:solidFill>
+                      <a:prstDash val="solid"/>
+                      <a:round/>
+                      <a:headEnd type="none" w="med" len="med"/>
+                      <a:tailEnd type="none" w="med" len="med"/>
+                    </a:lnB>
+                  </a:tcPr>
+                </a:tc>
+              </a:tr>
+              <a:tr h="566928">
+                <a:tc>
+                  <a:txBody>
+                    <a:bodyPr/>
+                    <a:lstStyle/>
+                    <a:p>
+                      <a:pPr indent="0" marL="0">
+                        <a:buNone/>
+                      </a:pPr>
+                      <a:r>
+                        <a:rPr lang="en-US" sz="1250" dirty="0">
+                          <a:solidFill>
+                            <a:srgbClr val="000000"/>
+                          </a:solidFill>
+                          <a:latin typeface="Calibri" pitchFamily="34" charset="0"/>
+                          <a:ea typeface="Calibri" pitchFamily="34" charset="-122"/>
+                          <a:cs typeface="Calibri" pitchFamily="34" charset="-120"/>
+                        </a:rPr>
                         <a:t>6</a:t>
                       </a:r>
                       <a:endParaRPr lang="en-US" sz="1250" dirty="0">
@@ -4311,7 +4662,7 @@
                 <a:ea typeface="Calibri" pitchFamily="34" charset="-122"/>
                 <a:cs typeface="Calibri" pitchFamily="34" charset="-120"/>
               </a:rPr>
-              <a:t>Do 5 first — it is cheap and immediately makes every other number more honest. Then 2, then 1.</a:t>
+              <a:t>Do 5 and 5b first — both are cheap and immediately make every other number more honest. Then 2, then 1.</a:t>
             </a:r>
             <a:endParaRPr lang="en-US" sz="1400" dirty="0"/>
           </a:p>
@@ -5076,7 +5427,7 @@
                 <a:ea typeface="Cambria" pitchFamily="34" charset="-122"/>
                 <a:cs typeface="Cambria" pitchFamily="34" charset="-120"/>
               </a:rPr>
-              <a:t>Part C — Five testable questions</a:t>
+              <a:t>Part C — Six testable questions</a:t>
             </a:r>
             <a:endParaRPr lang="en-US" sz="3400" dirty="0"/>
           </a:p>
@@ -5284,7 +5635,7 @@
                 <a:ea typeface="Calibri" pitchFamily="34" charset="-122"/>
                 <a:cs typeface="Calibri" pitchFamily="34" charset="-120"/>
               </a:rPr>
-              <a:t>PREDICTION  An 8-fold cartwheel with 9 triplets keeps wild-type diameter (255 nm, versus 233 nm if the whole centriole were 8-fold), leaves one triplet with no pinhead, and strains the spoke to 18.5° while triplets stay under 8°.</a:t>
+              <a:t>PREDICTION  An 8-fold cartwheel with 9 triplets keeps wild-type diameter (256 nm, versus 233 nm if the whole centriole were 8-fold), leaves 1 triplet with no pinhead, and swings the spoke 20.9° while triplets turn 10.3°.</a:t>
             </a:r>
             <a:endParaRPr lang="en-US" sz="1250" dirty="0"/>
           </a:p>
@@ -5712,7 +6063,7 @@
                 <a:ea typeface="Cambria" pitchFamily="34" charset="-122"/>
                 <a:cs typeface="Cambria" pitchFamily="34" charset="-120"/>
               </a:rPr>
-              <a:t>Five testable questions, continued</a:t>
+              <a:t>Testable questions, continued</a:t>
             </a:r>
             <a:endParaRPr lang="en-US" sz="3400" dirty="0"/>
           </a:p>
@@ -5881,7 +6232,7 @@
                 <a:ea typeface="Calibri" pitchFamily="34" charset="-122"/>
                 <a:cs typeface="Calibri" pitchFamily="34" charset="-120"/>
               </a:rPr>
-              <a:t>PREDICTION  Removing the C-tubule collapses diameter from 255 to 213 nm — a 42 nm drop — and raises joint strain from 1.3° to 36°, i.e. doublets are strongly disfavoured rather than merely smaller.</a:t>
+              <a:t>PREDICTION  Removing the C-tubule collapses diameter from 255 to 207 nm — a 48 nm drop — and raises joint strain from 1.4° to 21.2°, i.e. doublets are strongly disfavoured rather than merely smaller.</a:t>
             </a:r>
             <a:endParaRPr lang="en-US" sz="1250" dirty="0"/>
           </a:p>
@@ -6089,7 +6440,7 @@
                 <a:ea typeface="Calibri" pitchFamily="34" charset="-122"/>
                 <a:cs typeface="Calibri" pitchFamily="34" charset="-120"/>
               </a:rPr>
-              <a:t>PREDICTION  Diameter scales smoothly with A-tubule protofilament count — 169 nm at 9, 255 nm at 13, 299 nm at 18 — with no steric barrier anywhere in that range.</a:t>
+              <a:t>PREDICTION  The viable window is narrow and 13 sits inside it. Diameter is NOT monotonic — 130 nm at 9, 255 at 13, 267 at 15, back to 253 at 18 — and only 13 and 15 give a geometry with no microtubule clashes AND every contact reachable. 9, 11 and 18 all fail sterically.</a:t>
             </a:r>
             <a:endParaRPr lang="en-US" sz="1250" dirty="0"/>
           </a:p>
@@ -6128,7 +6479,7 @@
                 <a:ea typeface="Calibri" pitchFamily="34" charset="-122"/>
                 <a:cs typeface="Calibri" pitchFamily="34" charset="-120"/>
               </a:rPr>
-              <a:t>TEST  Compare species or mutants with non-canonical protofilament numbers.  FALSIFIED IF  diameter is insensitive to protofilament count, or clashes appear where the model predicts none.</a:t>
+              <a:t>TEST  Compare species or mutants with non-canonical protofilament numbers.  FALSIFIED IF  a clash-free centriole is found at 9 or 18 protofilaments, or diameter tracks protofilament count monotonically.</a:t>
             </a:r>
             <a:endParaRPr lang="en-US" sz="1250" dirty="0"/>
           </a:p>
@@ -6297,7 +6648,7 @@
                 <a:ea typeface="Calibri" pitchFamily="34" charset="-122"/>
                 <a:cs typeface="Calibri" pitchFamily="34" charset="-120"/>
               </a:rPr>
-              <a:t>PREDICTION  No — the response saturates. 40→45 nm adds 4.3 nm of diameter; 45→50 nm adds only 2.4 nm, while strain rises fivefold. Length buys progressively less width and progressively more strain.</a:t>
+              <a:t>PREDICTION  No — the response saturates. 40→45 nm adds 4.4 nm of diameter; 45→50 nm adds only 1.5 nm, while strain rises from 1.4° to 9.3°. Length buys progressively less width and progressively more strain.</a:t>
             </a:r>
             <a:endParaRPr lang="en-US" sz="1250" dirty="0"/>
           </a:p>
@@ -6392,6 +6743,2155 @@
 <file path=ppt/slides/slide7.xml><?xml version="1.0" encoding="utf-8"?>
 <p:sld xmlns:a="http://schemas.openxmlformats.org/drawingml/2006/main" xmlns:r="http://schemas.openxmlformats.org/officeDocument/2006/relationships" xmlns:p="http://schemas.openxmlformats.org/presentationml/2006/main">
   <p:cSld name="Slide 7">
+    <p:spTree>
+      <p:nvGrpSpPr>
+        <p:cNvPr id="1" name=""/>
+        <p:cNvGrpSpPr/>
+        <p:nvPr/>
+      </p:nvGrpSpPr>
+      <p:grpSpPr>
+        <a:xfrm>
+          <a:off x="0" y="0"/>
+          <a:ext cx="0" cy="0"/>
+          <a:chOff x="0" y="0"/>
+          <a:chExt cx="0" cy="0"/>
+        </a:xfrm>
+      </p:grpSpPr>
+      <p:sp>
+        <p:nvSpPr>
+          <p:cNvPr id="2" name="Text 0"/>
+          <p:cNvSpPr/>
+          <p:nvPr/>
+        </p:nvSpPr>
+        <p:spPr>
+          <a:xfrm>
+            <a:off x="640080" y="310896"/>
+            <a:ext cx="10881360" cy="274320"/>
+          </a:xfrm>
+          <a:prstGeom prst="rect">
+            <a:avLst/>
+          </a:prstGeom>
+          <a:noFill/>
+          <a:ln/>
+        </p:spPr>
+        <p:txBody>
+          <a:bodyPr wrap="square" rtlCol="0" anchor="ctr"/>
+          <a:lstStyle/>
+          <a:p>
+            <a:pPr indent="0" marL="0">
+              <a:buNone/>
+            </a:pPr>
+            <a:r>
+              <a:rPr lang="en-US" sz="1200" b="1" spc="200" kern="0" dirty="0">
+                <a:solidFill>
+                  <a:srgbClr val="6B3FA0"/>
+                </a:solidFill>
+                <a:latin typeface="Calibri" pitchFamily="34" charset="0"/>
+                <a:ea typeface="Calibri" pitchFamily="34" charset="-122"/>
+                <a:cs typeface="Calibri" pitchFamily="34" charset="-120"/>
+              </a:rPr>
+              <a:t>THE LIVE ONE</a:t>
+            </a:r>
+            <a:endParaRPr lang="en-US" sz="1200" dirty="0"/>
+          </a:p>
+        </p:txBody>
+      </p:sp>
+      <p:sp>
+        <p:nvSpPr>
+          <p:cNvPr id="3" name="Text 1"/>
+          <p:cNvSpPr/>
+          <p:nvPr/>
+        </p:nvSpPr>
+        <p:spPr>
+          <a:xfrm>
+            <a:off x="640080" y="566928"/>
+            <a:ext cx="10881360" cy="685800"/>
+          </a:xfrm>
+          <a:prstGeom prst="rect">
+            <a:avLst/>
+          </a:prstGeom>
+          <a:noFill/>
+          <a:ln/>
+        </p:spPr>
+        <p:txBody>
+          <a:bodyPr wrap="square" rtlCol="0" anchor="ctr"/>
+          <a:lstStyle/>
+          <a:p>
+            <a:pPr indent="0" marL="0">
+              <a:buNone/>
+            </a:pPr>
+            <a:r>
+              <a:rPr lang="en-US" sz="3400" b="1" dirty="0">
+                <a:solidFill>
+                  <a:srgbClr val="1A1A1A"/>
+                </a:solidFill>
+                <a:latin typeface="Cambria" pitchFamily="34" charset="0"/>
+                <a:ea typeface="Cambria" pitchFamily="34" charset="-122"/>
+                <a:cs typeface="Cambria" pitchFamily="34" charset="-120"/>
+              </a:rPr>
+              <a:t>Q6 — Where does the A-C linker sit in a short-spoke mutant?</a:t>
+            </a:r>
+            <a:endParaRPr lang="en-US" sz="3400" dirty="0"/>
+          </a:p>
+        </p:txBody>
+      </p:sp>
+      <p:sp>
+        <p:nvSpPr>
+          <p:cNvPr id="4" name="Text 2"/>
+          <p:cNvSpPr/>
+          <p:nvPr/>
+        </p:nvSpPr>
+        <p:spPr>
+          <a:xfrm>
+            <a:off x="640080" y="1170432"/>
+            <a:ext cx="10881360" cy="658368"/>
+          </a:xfrm>
+          <a:prstGeom prst="rect">
+            <a:avLst/>
+          </a:prstGeom>
+          <a:noFill/>
+          <a:ln/>
+        </p:spPr>
+        <p:txBody>
+          <a:bodyPr wrap="square" rtlCol="0" anchor="ctr"/>
+          <a:lstStyle/>
+          <a:p>
+            <a:pPr indent="0" marL="0">
+              <a:buNone/>
+            </a:pPr>
+            <a:r>
+              <a:rPr lang="en-US" sz="1450" dirty="0">
+                <a:solidFill>
+                  <a:srgbClr val="6B7280"/>
+                </a:solidFill>
+                <a:latin typeface="Calibri" pitchFamily="34" charset="0"/>
+                <a:ea typeface="Calibri" pitchFamily="34" charset="-122"/>
+                <a:cs typeface="Calibri" pitchFamily="34" charset="-120"/>
+              </a:rPr>
+              <a:t>A SAS-6 spoke shortened by 17 nm narrows real centrioles from 250 to 216 nm. At wild-type register the model gives only −21 nm, because the blade rotates outward and buffers the loss. Something has to give, and re-registering the linker was the proposal.</a:t>
+            </a:r>
+            <a:endParaRPr lang="en-US" sz="1450" dirty="0"/>
+          </a:p>
+        </p:txBody>
+      </p:sp>
+      <p:pic>
+        <p:nvPicPr>
+          <p:cNvPr id="5" name="Image 0" descr="/Users/hatzopou/Dropbox/MyDocs/Scripts/CenGeom/presentations/figs/d_register.png">    </p:cNvPr>
+          <p:cNvPicPr>
+            <a:picLocks noChangeAspect="1"/>
+          </p:cNvPicPr>
+          <p:nvPr/>
+        </p:nvPicPr>
+        <p:blipFill>
+          <a:blip r:embed="rId1"/>
+          <a:stretch>
+            <a:fillRect/>
+          </a:stretch>
+        </p:blipFill>
+        <p:spPr>
+          <a:xfrm>
+            <a:off x="7223760" y="1874520"/>
+            <a:ext cx="4297680" cy="2715768"/>
+          </a:xfrm>
+          <a:prstGeom prst="rect">
+            <a:avLst/>
+          </a:prstGeom>
+        </p:spPr>
+      </p:pic>
+      <p:graphicFrame>
+        <p:nvGraphicFramePr>
+          <p:cNvPr id="8" name="Table 0"/>
+          <p:cNvGraphicFramePr>
+            <a:graphicFrameLocks noGrp="1"/>
+          </p:cNvGraphicFramePr>
+          <p:nvPr>
+            <p:extLst>
+              <p:ext uri="{D42A27DB-BD31-4B8C-83A1-F6EECF244321}">
+                <p14:modId xmlns:p14="http://schemas.microsoft.com/office/powerpoint/2010/main" val="1579011935"/>
+              </p:ext>
+            </p:extLst>
+          </p:nvPr>
+        </p:nvGraphicFramePr>
+        <p:xfrm>
+          <a:off x="640080" y="1874520"/>
+          <a:ext cx="6400800" cy="914400"/>
+        </p:xfrm>
+        <a:graphic>
+          <a:graphicData uri="http://schemas.openxmlformats.org/drawingml/2006/table">
+            <a:tbl>
+              <a:tblPr/>
+              <a:tblGrid>
+                <a:gridCol w="2468880"/>
+                <a:gridCol w="1280160"/>
+                <a:gridCol w="1280160"/>
+                <a:gridCol w="1371600"/>
+              </a:tblGrid>
+              <a:tr h="384048">
+                <a:tc>
+                  <a:txBody>
+                    <a:bodyPr/>
+                    <a:lstStyle/>
+                    <a:p>
+                      <a:pPr indent="0" marL="0">
+                        <a:buNone/>
+                      </a:pPr>
+                      <a:r>
+                        <a:rPr lang="en-US" sz="1250" b="1" dirty="0">
+                          <a:solidFill>
+                            <a:srgbClr val="FFFFFF"/>
+                          </a:solidFill>
+                          <a:latin typeface="Calibri" pitchFamily="34" charset="0"/>
+                          <a:ea typeface="Calibri" pitchFamily="34" charset="-122"/>
+                          <a:cs typeface="Calibri" pitchFamily="34" charset="-120"/>
+                        </a:rPr>
+                        <a:t>Register (A / C)</a:t>
+                      </a:r>
+                      <a:endParaRPr lang="en-US" sz="1250" dirty="0">
+                        <a:latin typeface="Calibri" charset="0"/>
+                        <a:ea typeface="Calibri" charset="0"/>
+                        <a:cs typeface="Calibri" charset="0"/>
+                      </a:endParaRPr>
+                    </a:p>
+                  </a:txBody>
+                  <a:tcPr marL="91440" marR="91440" marT="45720" marB="45720" anchor="ctr">
+                    <a:lnL w="12700" cap="flat" cmpd="sng" algn="ctr">
+                      <a:solidFill>
+                        <a:srgbClr val="E3E0EC"/>
+                      </a:solidFill>
+                      <a:prstDash val="solid"/>
+                      <a:round/>
+                      <a:headEnd type="none" w="med" len="med"/>
+                      <a:tailEnd type="none" w="med" len="med"/>
+                    </a:lnL>
+                    <a:lnR w="12700" cap="flat" cmpd="sng" algn="ctr">
+                      <a:solidFill>
+                        <a:srgbClr val="E3E0EC"/>
+                      </a:solidFill>
+                      <a:prstDash val="solid"/>
+                      <a:round/>
+                      <a:headEnd type="none" w="med" len="med"/>
+                      <a:tailEnd type="none" w="med" len="med"/>
+                    </a:lnR>
+                    <a:lnT w="12700" cap="flat" cmpd="sng" algn="ctr">
+                      <a:solidFill>
+                        <a:srgbClr val="E3E0EC"/>
+                      </a:solidFill>
+                      <a:prstDash val="solid"/>
+                      <a:round/>
+                      <a:headEnd type="none" w="med" len="med"/>
+                      <a:tailEnd type="none" w="med" len="med"/>
+                    </a:lnT>
+                    <a:lnB w="12700" cap="flat" cmpd="sng" algn="ctr">
+                      <a:solidFill>
+                        <a:srgbClr val="E3E0EC"/>
+                      </a:solidFill>
+                      <a:prstDash val="solid"/>
+                      <a:round/>
+                      <a:headEnd type="none" w="med" len="med"/>
+                      <a:tailEnd type="none" w="med" len="med"/>
+                    </a:lnB>
+                    <a:solidFill>
+                      <a:srgbClr val="6B3FA0"/>
+                    </a:solidFill>
+                  </a:tcPr>
+                </a:tc>
+                <a:tc>
+                  <a:txBody>
+                    <a:bodyPr/>
+                    <a:lstStyle/>
+                    <a:p>
+                      <a:pPr indent="0" marL="0">
+                        <a:buNone/>
+                      </a:pPr>
+                      <a:r>
+                        <a:rPr lang="en-US" sz="1250" b="1" dirty="0">
+                          <a:solidFill>
+                            <a:srgbClr val="FFFFFF"/>
+                          </a:solidFill>
+                          <a:latin typeface="Calibri" pitchFamily="34" charset="0"/>
+                          <a:ea typeface="Calibri" pitchFamily="34" charset="-122"/>
+                          <a:cs typeface="Calibri" pitchFamily="34" charset="-120"/>
+                        </a:rPr>
+                        <a:t>Outer Ø</a:t>
+                      </a:r>
+                      <a:endParaRPr lang="en-US" sz="1250" dirty="0">
+                        <a:latin typeface="Calibri" charset="0"/>
+                        <a:ea typeface="Calibri" charset="0"/>
+                        <a:cs typeface="Calibri" charset="0"/>
+                      </a:endParaRPr>
+                    </a:p>
+                  </a:txBody>
+                  <a:tcPr marL="91440" marR="91440" marT="45720" marB="45720" anchor="ctr">
+                    <a:lnL w="12700" cap="flat" cmpd="sng" algn="ctr">
+                      <a:solidFill>
+                        <a:srgbClr val="E3E0EC"/>
+                      </a:solidFill>
+                      <a:prstDash val="solid"/>
+                      <a:round/>
+                      <a:headEnd type="none" w="med" len="med"/>
+                      <a:tailEnd type="none" w="med" len="med"/>
+                    </a:lnL>
+                    <a:lnR w="12700" cap="flat" cmpd="sng" algn="ctr">
+                      <a:solidFill>
+                        <a:srgbClr val="E3E0EC"/>
+                      </a:solidFill>
+                      <a:prstDash val="solid"/>
+                      <a:round/>
+                      <a:headEnd type="none" w="med" len="med"/>
+                      <a:tailEnd type="none" w="med" len="med"/>
+                    </a:lnR>
+                    <a:lnT w="12700" cap="flat" cmpd="sng" algn="ctr">
+                      <a:solidFill>
+                        <a:srgbClr val="E3E0EC"/>
+                      </a:solidFill>
+                      <a:prstDash val="solid"/>
+                      <a:round/>
+                      <a:headEnd type="none" w="med" len="med"/>
+                      <a:tailEnd type="none" w="med" len="med"/>
+                    </a:lnT>
+                    <a:lnB w="12700" cap="flat" cmpd="sng" algn="ctr">
+                      <a:solidFill>
+                        <a:srgbClr val="E3E0EC"/>
+                      </a:solidFill>
+                      <a:prstDash val="solid"/>
+                      <a:round/>
+                      <a:headEnd type="none" w="med" len="med"/>
+                      <a:tailEnd type="none" w="med" len="med"/>
+                    </a:lnB>
+                    <a:solidFill>
+                      <a:srgbClr val="6B3FA0"/>
+                    </a:solidFill>
+                  </a:tcPr>
+                </a:tc>
+                <a:tc>
+                  <a:txBody>
+                    <a:bodyPr/>
+                    <a:lstStyle/>
+                    <a:p>
+                      <a:pPr indent="0" marL="0">
+                        <a:buNone/>
+                      </a:pPr>
+                      <a:r>
+                        <a:rPr lang="en-US" sz="1250" b="1" dirty="0">
+                          <a:solidFill>
+                            <a:srgbClr val="FFFFFF"/>
+                          </a:solidFill>
+                          <a:latin typeface="Calibri" pitchFamily="34" charset="0"/>
+                          <a:ea typeface="Calibri" pitchFamily="34" charset="-122"/>
+                          <a:cs typeface="Calibri" pitchFamily="34" charset="-120"/>
+                        </a:rPr>
+                        <a:t>Tilt change</a:t>
+                      </a:r>
+                      <a:endParaRPr lang="en-US" sz="1250" dirty="0">
+                        <a:latin typeface="Calibri" charset="0"/>
+                        <a:ea typeface="Calibri" charset="0"/>
+                        <a:cs typeface="Calibri" charset="0"/>
+                      </a:endParaRPr>
+                    </a:p>
+                  </a:txBody>
+                  <a:tcPr marL="91440" marR="91440" marT="45720" marB="45720" anchor="ctr">
+                    <a:lnL w="12700" cap="flat" cmpd="sng" algn="ctr">
+                      <a:solidFill>
+                        <a:srgbClr val="E3E0EC"/>
+                      </a:solidFill>
+                      <a:prstDash val="solid"/>
+                      <a:round/>
+                      <a:headEnd type="none" w="med" len="med"/>
+                      <a:tailEnd type="none" w="med" len="med"/>
+                    </a:lnL>
+                    <a:lnR w="12700" cap="flat" cmpd="sng" algn="ctr">
+                      <a:solidFill>
+                        <a:srgbClr val="E3E0EC"/>
+                      </a:solidFill>
+                      <a:prstDash val="solid"/>
+                      <a:round/>
+                      <a:headEnd type="none" w="med" len="med"/>
+                      <a:tailEnd type="none" w="med" len="med"/>
+                    </a:lnR>
+                    <a:lnT w="12700" cap="flat" cmpd="sng" algn="ctr">
+                      <a:solidFill>
+                        <a:srgbClr val="E3E0EC"/>
+                      </a:solidFill>
+                      <a:prstDash val="solid"/>
+                      <a:round/>
+                      <a:headEnd type="none" w="med" len="med"/>
+                      <a:tailEnd type="none" w="med" len="med"/>
+                    </a:lnT>
+                    <a:lnB w="12700" cap="flat" cmpd="sng" algn="ctr">
+                      <a:solidFill>
+                        <a:srgbClr val="E3E0EC"/>
+                      </a:solidFill>
+                      <a:prstDash val="solid"/>
+                      <a:round/>
+                      <a:headEnd type="none" w="med" len="med"/>
+                      <a:tailEnd type="none" w="med" len="med"/>
+                    </a:lnB>
+                    <a:solidFill>
+                      <a:srgbClr val="6B3FA0"/>
+                    </a:solidFill>
+                  </a:tcPr>
+                </a:tc>
+                <a:tc>
+                  <a:txBody>
+                    <a:bodyPr/>
+                    <a:lstStyle/>
+                    <a:p>
+                      <a:pPr indent="0" marL="0">
+                        <a:buNone/>
+                      </a:pPr>
+                      <a:r>
+                        <a:rPr lang="en-US" sz="1250" b="1" dirty="0">
+                          <a:solidFill>
+                            <a:srgbClr val="FFFFFF"/>
+                          </a:solidFill>
+                          <a:latin typeface="Calibri" pitchFamily="34" charset="0"/>
+                          <a:ea typeface="Calibri" pitchFamily="34" charset="-122"/>
+                          <a:cs typeface="Calibri" pitchFamily="34" charset="-120"/>
+                        </a:rPr>
+                        <a:t>Reachable?</a:t>
+                      </a:r>
+                      <a:endParaRPr lang="en-US" sz="1250" dirty="0">
+                        <a:latin typeface="Calibri" charset="0"/>
+                        <a:ea typeface="Calibri" charset="0"/>
+                        <a:cs typeface="Calibri" charset="0"/>
+                      </a:endParaRPr>
+                    </a:p>
+                  </a:txBody>
+                  <a:tcPr marL="91440" marR="91440" marT="45720" marB="45720" anchor="ctr">
+                    <a:lnL w="12700" cap="flat" cmpd="sng" algn="ctr">
+                      <a:solidFill>
+                        <a:srgbClr val="E3E0EC"/>
+                      </a:solidFill>
+                      <a:prstDash val="solid"/>
+                      <a:round/>
+                      <a:headEnd type="none" w="med" len="med"/>
+                      <a:tailEnd type="none" w="med" len="med"/>
+                    </a:lnL>
+                    <a:lnR w="12700" cap="flat" cmpd="sng" algn="ctr">
+                      <a:solidFill>
+                        <a:srgbClr val="E3E0EC"/>
+                      </a:solidFill>
+                      <a:prstDash val="solid"/>
+                      <a:round/>
+                      <a:headEnd type="none" w="med" len="med"/>
+                      <a:tailEnd type="none" w="med" len="med"/>
+                    </a:lnR>
+                    <a:lnT w="12700" cap="flat" cmpd="sng" algn="ctr">
+                      <a:solidFill>
+                        <a:srgbClr val="E3E0EC"/>
+                      </a:solidFill>
+                      <a:prstDash val="solid"/>
+                      <a:round/>
+                      <a:headEnd type="none" w="med" len="med"/>
+                      <a:tailEnd type="none" w="med" len="med"/>
+                    </a:lnT>
+                    <a:lnB w="12700" cap="flat" cmpd="sng" algn="ctr">
+                      <a:solidFill>
+                        <a:srgbClr val="E3E0EC"/>
+                      </a:solidFill>
+                      <a:prstDash val="solid"/>
+                      <a:round/>
+                      <a:headEnd type="none" w="med" len="med"/>
+                      <a:tailEnd type="none" w="med" len="med"/>
+                    </a:lnB>
+                    <a:solidFill>
+                      <a:srgbClr val="6B3FA0"/>
+                    </a:solidFill>
+                  </a:tcPr>
+                </a:tc>
+              </a:tr>
+              <a:tr h="384048">
+                <a:tc>
+                  <a:txBody>
+                    <a:bodyPr/>
+                    <a:lstStyle/>
+                    <a:p>
+                      <a:pPr indent="0" marL="0">
+                        <a:buNone/>
+                      </a:pPr>
+                      <a:r>
+                        <a:rPr lang="en-US" sz="1250" dirty="0">
+                          <a:solidFill>
+                            <a:srgbClr val="000000"/>
+                          </a:solidFill>
+                          <a:latin typeface="Calibri" pitchFamily="34" charset="0"/>
+                          <a:ea typeface="Calibri" pitchFamily="34" charset="-122"/>
+                          <a:cs typeface="Calibri" pitchFamily="34" charset="-120"/>
+                        </a:rPr>
+                        <a:t>+0 / +0  wild type</a:t>
+                      </a:r>
+                      <a:endParaRPr lang="en-US" sz="1250" dirty="0">
+                        <a:latin typeface="Calibri" charset="0"/>
+                        <a:ea typeface="Calibri" charset="0"/>
+                        <a:cs typeface="Calibri" charset="0"/>
+                      </a:endParaRPr>
+                    </a:p>
+                  </a:txBody>
+                  <a:tcPr marL="91440" marR="91440" marT="45720" marB="45720" anchor="ctr">
+                    <a:lnL w="12700" cap="flat" cmpd="sng" algn="ctr">
+                      <a:solidFill>
+                        <a:srgbClr val="E3E0EC"/>
+                      </a:solidFill>
+                      <a:prstDash val="solid"/>
+                      <a:round/>
+                      <a:headEnd type="none" w="med" len="med"/>
+                      <a:tailEnd type="none" w="med" len="med"/>
+                    </a:lnL>
+                    <a:lnR w="12700" cap="flat" cmpd="sng" algn="ctr">
+                      <a:solidFill>
+                        <a:srgbClr val="E3E0EC"/>
+                      </a:solidFill>
+                      <a:prstDash val="solid"/>
+                      <a:round/>
+                      <a:headEnd type="none" w="med" len="med"/>
+                      <a:tailEnd type="none" w="med" len="med"/>
+                    </a:lnR>
+                    <a:lnT w="12700" cap="flat" cmpd="sng" algn="ctr">
+                      <a:solidFill>
+                        <a:srgbClr val="E3E0EC"/>
+                      </a:solidFill>
+                      <a:prstDash val="solid"/>
+                      <a:round/>
+                      <a:headEnd type="none" w="med" len="med"/>
+                      <a:tailEnd type="none" w="med" len="med"/>
+                    </a:lnT>
+                    <a:lnB w="12700" cap="flat" cmpd="sng" algn="ctr">
+                      <a:solidFill>
+                        <a:srgbClr val="E3E0EC"/>
+                      </a:solidFill>
+                      <a:prstDash val="solid"/>
+                      <a:round/>
+                      <a:headEnd type="none" w="med" len="med"/>
+                      <a:tailEnd type="none" w="med" len="med"/>
+                    </a:lnB>
+                  </a:tcPr>
+                </a:tc>
+                <a:tc>
+                  <a:txBody>
+                    <a:bodyPr/>
+                    <a:lstStyle/>
+                    <a:p>
+                      <a:pPr indent="0" marL="0">
+                        <a:buNone/>
+                      </a:pPr>
+                      <a:r>
+                        <a:rPr lang="en-US" sz="1250" dirty="0">
+                          <a:solidFill>
+                            <a:srgbClr val="000000"/>
+                          </a:solidFill>
+                          <a:latin typeface="Calibri" pitchFamily="34" charset="0"/>
+                          <a:ea typeface="Calibri" pitchFamily="34" charset="-122"/>
+                          <a:cs typeface="Calibri" pitchFamily="34" charset="-120"/>
+                        </a:rPr>
+                        <a:t>234 nm</a:t>
+                      </a:r>
+                      <a:endParaRPr lang="en-US" sz="1250" dirty="0">
+                        <a:latin typeface="Calibri" charset="0"/>
+                        <a:ea typeface="Calibri" charset="0"/>
+                        <a:cs typeface="Calibri" charset="0"/>
+                      </a:endParaRPr>
+                    </a:p>
+                  </a:txBody>
+                  <a:tcPr marL="91440" marR="91440" marT="45720" marB="45720" anchor="ctr">
+                    <a:lnL w="12700" cap="flat" cmpd="sng" algn="ctr">
+                      <a:solidFill>
+                        <a:srgbClr val="E3E0EC"/>
+                      </a:solidFill>
+                      <a:prstDash val="solid"/>
+                      <a:round/>
+                      <a:headEnd type="none" w="med" len="med"/>
+                      <a:tailEnd type="none" w="med" len="med"/>
+                    </a:lnL>
+                    <a:lnR w="12700" cap="flat" cmpd="sng" algn="ctr">
+                      <a:solidFill>
+                        <a:srgbClr val="E3E0EC"/>
+                      </a:solidFill>
+                      <a:prstDash val="solid"/>
+                      <a:round/>
+                      <a:headEnd type="none" w="med" len="med"/>
+                      <a:tailEnd type="none" w="med" len="med"/>
+                    </a:lnR>
+                    <a:lnT w="12700" cap="flat" cmpd="sng" algn="ctr">
+                      <a:solidFill>
+                        <a:srgbClr val="E3E0EC"/>
+                      </a:solidFill>
+                      <a:prstDash val="solid"/>
+                      <a:round/>
+                      <a:headEnd type="none" w="med" len="med"/>
+                      <a:tailEnd type="none" w="med" len="med"/>
+                    </a:lnT>
+                    <a:lnB w="12700" cap="flat" cmpd="sng" algn="ctr">
+                      <a:solidFill>
+                        <a:srgbClr val="E3E0EC"/>
+                      </a:solidFill>
+                      <a:prstDash val="solid"/>
+                      <a:round/>
+                      <a:headEnd type="none" w="med" len="med"/>
+                      <a:tailEnd type="none" w="med" len="med"/>
+                    </a:lnB>
+                  </a:tcPr>
+                </a:tc>
+                <a:tc>
+                  <a:txBody>
+                    <a:bodyPr/>
+                    <a:lstStyle/>
+                    <a:p>
+                      <a:pPr indent="0" marL="0">
+                        <a:buNone/>
+                      </a:pPr>
+                      <a:r>
+                        <a:rPr lang="en-US" sz="1250" dirty="0">
+                          <a:solidFill>
+                            <a:srgbClr val="000000"/>
+                          </a:solidFill>
+                          <a:latin typeface="Calibri" pitchFamily="34" charset="0"/>
+                          <a:ea typeface="Calibri" pitchFamily="34" charset="-122"/>
+                          <a:cs typeface="Calibri" pitchFamily="34" charset="-120"/>
+                        </a:rPr>
+                        <a:t>+12.9°</a:t>
+                      </a:r>
+                      <a:endParaRPr lang="en-US" sz="1250" dirty="0">
+                        <a:latin typeface="Calibri" charset="0"/>
+                        <a:ea typeface="Calibri" charset="0"/>
+                        <a:cs typeface="Calibri" charset="0"/>
+                      </a:endParaRPr>
+                    </a:p>
+                  </a:txBody>
+                  <a:tcPr marL="91440" marR="91440" marT="45720" marB="45720" anchor="ctr">
+                    <a:lnL w="12700" cap="flat" cmpd="sng" algn="ctr">
+                      <a:solidFill>
+                        <a:srgbClr val="E3E0EC"/>
+                      </a:solidFill>
+                      <a:prstDash val="solid"/>
+                      <a:round/>
+                      <a:headEnd type="none" w="med" len="med"/>
+                      <a:tailEnd type="none" w="med" len="med"/>
+                    </a:lnL>
+                    <a:lnR w="12700" cap="flat" cmpd="sng" algn="ctr">
+                      <a:solidFill>
+                        <a:srgbClr val="E3E0EC"/>
+                      </a:solidFill>
+                      <a:prstDash val="solid"/>
+                      <a:round/>
+                      <a:headEnd type="none" w="med" len="med"/>
+                      <a:tailEnd type="none" w="med" len="med"/>
+                    </a:lnR>
+                    <a:lnT w="12700" cap="flat" cmpd="sng" algn="ctr">
+                      <a:solidFill>
+                        <a:srgbClr val="E3E0EC"/>
+                      </a:solidFill>
+                      <a:prstDash val="solid"/>
+                      <a:round/>
+                      <a:headEnd type="none" w="med" len="med"/>
+                      <a:tailEnd type="none" w="med" len="med"/>
+                    </a:lnT>
+                    <a:lnB w="12700" cap="flat" cmpd="sng" algn="ctr">
+                      <a:solidFill>
+                        <a:srgbClr val="E3E0EC"/>
+                      </a:solidFill>
+                      <a:prstDash val="solid"/>
+                      <a:round/>
+                      <a:headEnd type="none" w="med" len="med"/>
+                      <a:tailEnd type="none" w="med" len="med"/>
+                    </a:lnB>
+                  </a:tcPr>
+                </a:tc>
+                <a:tc>
+                  <a:txBody>
+                    <a:bodyPr/>
+                    <a:lstStyle/>
+                    <a:p>
+                      <a:pPr indent="0" marL="0">
+                        <a:buNone/>
+                      </a:pPr>
+                      <a:r>
+                        <a:rPr lang="en-US" sz="1250" dirty="0">
+                          <a:solidFill>
+                            <a:srgbClr val="000000"/>
+                          </a:solidFill>
+                          <a:latin typeface="Calibri" pitchFamily="34" charset="0"/>
+                          <a:ea typeface="Calibri" pitchFamily="34" charset="-122"/>
+                          <a:cs typeface="Calibri" pitchFamily="34" charset="-120"/>
+                        </a:rPr>
+                        <a:t>yes</a:t>
+                      </a:r>
+                      <a:endParaRPr lang="en-US" sz="1250" dirty="0">
+                        <a:latin typeface="Calibri" charset="0"/>
+                        <a:ea typeface="Calibri" charset="0"/>
+                        <a:cs typeface="Calibri" charset="0"/>
+                      </a:endParaRPr>
+                    </a:p>
+                  </a:txBody>
+                  <a:tcPr marL="91440" marR="91440" marT="45720" marB="45720" anchor="ctr">
+                    <a:lnL w="12700" cap="flat" cmpd="sng" algn="ctr">
+                      <a:solidFill>
+                        <a:srgbClr val="E3E0EC"/>
+                      </a:solidFill>
+                      <a:prstDash val="solid"/>
+                      <a:round/>
+                      <a:headEnd type="none" w="med" len="med"/>
+                      <a:tailEnd type="none" w="med" len="med"/>
+                    </a:lnL>
+                    <a:lnR w="12700" cap="flat" cmpd="sng" algn="ctr">
+                      <a:solidFill>
+                        <a:srgbClr val="E3E0EC"/>
+                      </a:solidFill>
+                      <a:prstDash val="solid"/>
+                      <a:round/>
+                      <a:headEnd type="none" w="med" len="med"/>
+                      <a:tailEnd type="none" w="med" len="med"/>
+                    </a:lnR>
+                    <a:lnT w="12700" cap="flat" cmpd="sng" algn="ctr">
+                      <a:solidFill>
+                        <a:srgbClr val="E3E0EC"/>
+                      </a:solidFill>
+                      <a:prstDash val="solid"/>
+                      <a:round/>
+                      <a:headEnd type="none" w="med" len="med"/>
+                      <a:tailEnd type="none" w="med" len="med"/>
+                    </a:lnT>
+                    <a:lnB w="12700" cap="flat" cmpd="sng" algn="ctr">
+                      <a:solidFill>
+                        <a:srgbClr val="E3E0EC"/>
+                      </a:solidFill>
+                      <a:prstDash val="solid"/>
+                      <a:round/>
+                      <a:headEnd type="none" w="med" len="med"/>
+                      <a:tailEnd type="none" w="med" len="med"/>
+                    </a:lnB>
+                  </a:tcPr>
+                </a:tc>
+              </a:tr>
+              <a:tr h="384048">
+                <a:tc>
+                  <a:txBody>
+                    <a:bodyPr/>
+                    <a:lstStyle/>
+                    <a:p>
+                      <a:pPr indent="0" marL="0">
+                        <a:buNone/>
+                      </a:pPr>
+                      <a:r>
+                        <a:rPr lang="en-US" sz="1250" dirty="0">
+                          <a:solidFill>
+                            <a:srgbClr val="000000"/>
+                          </a:solidFill>
+                          <a:latin typeface="Calibri" pitchFamily="34" charset="0"/>
+                          <a:ea typeface="Calibri" pitchFamily="34" charset="-122"/>
+                          <a:cs typeface="Calibri" pitchFamily="34" charset="-120"/>
+                        </a:rPr>
+                        <a:t>+1 / +1  model's pick</a:t>
+                      </a:r>
+                      <a:endParaRPr lang="en-US" sz="1250" dirty="0">
+                        <a:latin typeface="Calibri" charset="0"/>
+                        <a:ea typeface="Calibri" charset="0"/>
+                        <a:cs typeface="Calibri" charset="0"/>
+                      </a:endParaRPr>
+                    </a:p>
+                  </a:txBody>
+                  <a:tcPr marL="91440" marR="91440" marT="45720" marB="45720" anchor="ctr">
+                    <a:lnL w="12700" cap="flat" cmpd="sng" algn="ctr">
+                      <a:solidFill>
+                        <a:srgbClr val="E3E0EC"/>
+                      </a:solidFill>
+                      <a:prstDash val="solid"/>
+                      <a:round/>
+                      <a:headEnd type="none" w="med" len="med"/>
+                      <a:tailEnd type="none" w="med" len="med"/>
+                    </a:lnL>
+                    <a:lnR w="12700" cap="flat" cmpd="sng" algn="ctr">
+                      <a:solidFill>
+                        <a:srgbClr val="E3E0EC"/>
+                      </a:solidFill>
+                      <a:prstDash val="solid"/>
+                      <a:round/>
+                      <a:headEnd type="none" w="med" len="med"/>
+                      <a:tailEnd type="none" w="med" len="med"/>
+                    </a:lnR>
+                    <a:lnT w="12700" cap="flat" cmpd="sng" algn="ctr">
+                      <a:solidFill>
+                        <a:srgbClr val="E3E0EC"/>
+                      </a:solidFill>
+                      <a:prstDash val="solid"/>
+                      <a:round/>
+                      <a:headEnd type="none" w="med" len="med"/>
+                      <a:tailEnd type="none" w="med" len="med"/>
+                    </a:lnT>
+                    <a:lnB w="12700" cap="flat" cmpd="sng" algn="ctr">
+                      <a:solidFill>
+                        <a:srgbClr val="E3E0EC"/>
+                      </a:solidFill>
+                      <a:prstDash val="solid"/>
+                      <a:round/>
+                      <a:headEnd type="none" w="med" len="med"/>
+                      <a:tailEnd type="none" w="med" len="med"/>
+                    </a:lnB>
+                  </a:tcPr>
+                </a:tc>
+                <a:tc>
+                  <a:txBody>
+                    <a:bodyPr/>
+                    <a:lstStyle/>
+                    <a:p>
+                      <a:pPr indent="0" marL="0">
+                        <a:buNone/>
+                      </a:pPr>
+                      <a:r>
+                        <a:rPr lang="en-US" sz="1250" dirty="0">
+                          <a:solidFill>
+                            <a:srgbClr val="000000"/>
+                          </a:solidFill>
+                          <a:latin typeface="Calibri" pitchFamily="34" charset="0"/>
+                          <a:ea typeface="Calibri" pitchFamily="34" charset="-122"/>
+                          <a:cs typeface="Calibri" pitchFamily="34" charset="-120"/>
+                        </a:rPr>
+                        <a:t>231 nm</a:t>
+                      </a:r>
+                      <a:endParaRPr lang="en-US" sz="1250" dirty="0">
+                        <a:latin typeface="Calibri" charset="0"/>
+                        <a:ea typeface="Calibri" charset="0"/>
+                        <a:cs typeface="Calibri" charset="0"/>
+                      </a:endParaRPr>
+                    </a:p>
+                  </a:txBody>
+                  <a:tcPr marL="91440" marR="91440" marT="45720" marB="45720" anchor="ctr">
+                    <a:lnL w="12700" cap="flat" cmpd="sng" algn="ctr">
+                      <a:solidFill>
+                        <a:srgbClr val="E3E0EC"/>
+                      </a:solidFill>
+                      <a:prstDash val="solid"/>
+                      <a:round/>
+                      <a:headEnd type="none" w="med" len="med"/>
+                      <a:tailEnd type="none" w="med" len="med"/>
+                    </a:lnL>
+                    <a:lnR w="12700" cap="flat" cmpd="sng" algn="ctr">
+                      <a:solidFill>
+                        <a:srgbClr val="E3E0EC"/>
+                      </a:solidFill>
+                      <a:prstDash val="solid"/>
+                      <a:round/>
+                      <a:headEnd type="none" w="med" len="med"/>
+                      <a:tailEnd type="none" w="med" len="med"/>
+                    </a:lnR>
+                    <a:lnT w="12700" cap="flat" cmpd="sng" algn="ctr">
+                      <a:solidFill>
+                        <a:srgbClr val="E3E0EC"/>
+                      </a:solidFill>
+                      <a:prstDash val="solid"/>
+                      <a:round/>
+                      <a:headEnd type="none" w="med" len="med"/>
+                      <a:tailEnd type="none" w="med" len="med"/>
+                    </a:lnT>
+                    <a:lnB w="12700" cap="flat" cmpd="sng" algn="ctr">
+                      <a:solidFill>
+                        <a:srgbClr val="E3E0EC"/>
+                      </a:solidFill>
+                      <a:prstDash val="solid"/>
+                      <a:round/>
+                      <a:headEnd type="none" w="med" len="med"/>
+                      <a:tailEnd type="none" w="med" len="med"/>
+                    </a:lnB>
+                  </a:tcPr>
+                </a:tc>
+                <a:tc>
+                  <a:txBody>
+                    <a:bodyPr/>
+                    <a:lstStyle/>
+                    <a:p>
+                      <a:pPr indent="0" marL="0">
+                        <a:buNone/>
+                      </a:pPr>
+                      <a:r>
+                        <a:rPr lang="en-US" sz="1250" dirty="0">
+                          <a:solidFill>
+                            <a:srgbClr val="000000"/>
+                          </a:solidFill>
+                          <a:latin typeface="Calibri" pitchFamily="34" charset="0"/>
+                          <a:ea typeface="Calibri" pitchFamily="34" charset="-122"/>
+                          <a:cs typeface="Calibri" pitchFamily="34" charset="-120"/>
+                        </a:rPr>
+                        <a:t>+10.2°</a:t>
+                      </a:r>
+                      <a:endParaRPr lang="en-US" sz="1250" dirty="0">
+                        <a:latin typeface="Calibri" charset="0"/>
+                        <a:ea typeface="Calibri" charset="0"/>
+                        <a:cs typeface="Calibri" charset="0"/>
+                      </a:endParaRPr>
+                    </a:p>
+                  </a:txBody>
+                  <a:tcPr marL="91440" marR="91440" marT="45720" marB="45720" anchor="ctr">
+                    <a:lnL w="12700" cap="flat" cmpd="sng" algn="ctr">
+                      <a:solidFill>
+                        <a:srgbClr val="E3E0EC"/>
+                      </a:solidFill>
+                      <a:prstDash val="solid"/>
+                      <a:round/>
+                      <a:headEnd type="none" w="med" len="med"/>
+                      <a:tailEnd type="none" w="med" len="med"/>
+                    </a:lnL>
+                    <a:lnR w="12700" cap="flat" cmpd="sng" algn="ctr">
+                      <a:solidFill>
+                        <a:srgbClr val="E3E0EC"/>
+                      </a:solidFill>
+                      <a:prstDash val="solid"/>
+                      <a:round/>
+                      <a:headEnd type="none" w="med" len="med"/>
+                      <a:tailEnd type="none" w="med" len="med"/>
+                    </a:lnR>
+                    <a:lnT w="12700" cap="flat" cmpd="sng" algn="ctr">
+                      <a:solidFill>
+                        <a:srgbClr val="E3E0EC"/>
+                      </a:solidFill>
+                      <a:prstDash val="solid"/>
+                      <a:round/>
+                      <a:headEnd type="none" w="med" len="med"/>
+                      <a:tailEnd type="none" w="med" len="med"/>
+                    </a:lnT>
+                    <a:lnB w="12700" cap="flat" cmpd="sng" algn="ctr">
+                      <a:solidFill>
+                        <a:srgbClr val="E3E0EC"/>
+                      </a:solidFill>
+                      <a:prstDash val="solid"/>
+                      <a:round/>
+                      <a:headEnd type="none" w="med" len="med"/>
+                      <a:tailEnd type="none" w="med" len="med"/>
+                    </a:lnB>
+                  </a:tcPr>
+                </a:tc>
+                <a:tc>
+                  <a:txBody>
+                    <a:bodyPr/>
+                    <a:lstStyle/>
+                    <a:p>
+                      <a:pPr indent="0" marL="0">
+                        <a:buNone/>
+                      </a:pPr>
+                      <a:r>
+                        <a:rPr lang="en-US" sz="1250" dirty="0">
+                          <a:solidFill>
+                            <a:srgbClr val="000000"/>
+                          </a:solidFill>
+                          <a:latin typeface="Calibri" pitchFamily="34" charset="0"/>
+                          <a:ea typeface="Calibri" pitchFamily="34" charset="-122"/>
+                          <a:cs typeface="Calibri" pitchFamily="34" charset="-120"/>
+                        </a:rPr>
+                        <a:t>yes</a:t>
+                      </a:r>
+                      <a:endParaRPr lang="en-US" sz="1250" dirty="0">
+                        <a:latin typeface="Calibri" charset="0"/>
+                        <a:ea typeface="Calibri" charset="0"/>
+                        <a:cs typeface="Calibri" charset="0"/>
+                      </a:endParaRPr>
+                    </a:p>
+                  </a:txBody>
+                  <a:tcPr marL="91440" marR="91440" marT="45720" marB="45720" anchor="ctr">
+                    <a:lnL w="12700" cap="flat" cmpd="sng" algn="ctr">
+                      <a:solidFill>
+                        <a:srgbClr val="E3E0EC"/>
+                      </a:solidFill>
+                      <a:prstDash val="solid"/>
+                      <a:round/>
+                      <a:headEnd type="none" w="med" len="med"/>
+                      <a:tailEnd type="none" w="med" len="med"/>
+                    </a:lnL>
+                    <a:lnR w="12700" cap="flat" cmpd="sng" algn="ctr">
+                      <a:solidFill>
+                        <a:srgbClr val="E3E0EC"/>
+                      </a:solidFill>
+                      <a:prstDash val="solid"/>
+                      <a:round/>
+                      <a:headEnd type="none" w="med" len="med"/>
+                      <a:tailEnd type="none" w="med" len="med"/>
+                    </a:lnR>
+                    <a:lnT w="12700" cap="flat" cmpd="sng" algn="ctr">
+                      <a:solidFill>
+                        <a:srgbClr val="E3E0EC"/>
+                      </a:solidFill>
+                      <a:prstDash val="solid"/>
+                      <a:round/>
+                      <a:headEnd type="none" w="med" len="med"/>
+                      <a:tailEnd type="none" w="med" len="med"/>
+                    </a:lnT>
+                    <a:lnB w="12700" cap="flat" cmpd="sng" algn="ctr">
+                      <a:solidFill>
+                        <a:srgbClr val="E3E0EC"/>
+                      </a:solidFill>
+                      <a:prstDash val="solid"/>
+                      <a:round/>
+                      <a:headEnd type="none" w="med" len="med"/>
+                      <a:tailEnd type="none" w="med" len="med"/>
+                    </a:lnB>
+                  </a:tcPr>
+                </a:tc>
+              </a:tr>
+              <a:tr h="384048">
+                <a:tc>
+                  <a:txBody>
+                    <a:bodyPr/>
+                    <a:lstStyle/>
+                    <a:p>
+                      <a:pPr indent="0" marL="0">
+                        <a:buNone/>
+                      </a:pPr>
+                      <a:r>
+                        <a:rPr lang="en-US" sz="1250" dirty="0">
+                          <a:solidFill>
+                            <a:srgbClr val="000000"/>
+                          </a:solidFill>
+                          <a:latin typeface="Calibri" pitchFamily="34" charset="0"/>
+                          <a:ea typeface="Calibri" pitchFamily="34" charset="-122"/>
+                          <a:cs typeface="Calibri" pitchFamily="34" charset="-120"/>
+                        </a:rPr>
+                        <a:t>+2 / +0</a:t>
+                      </a:r>
+                      <a:endParaRPr lang="en-US" sz="1250" dirty="0">
+                        <a:latin typeface="Calibri" charset="0"/>
+                        <a:ea typeface="Calibri" charset="0"/>
+                        <a:cs typeface="Calibri" charset="0"/>
+                      </a:endParaRPr>
+                    </a:p>
+                  </a:txBody>
+                  <a:tcPr marL="91440" marR="91440" marT="45720" marB="45720" anchor="ctr">
+                    <a:lnL w="12700" cap="flat" cmpd="sng" algn="ctr">
+                      <a:solidFill>
+                        <a:srgbClr val="E3E0EC"/>
+                      </a:solidFill>
+                      <a:prstDash val="solid"/>
+                      <a:round/>
+                      <a:headEnd type="none" w="med" len="med"/>
+                      <a:tailEnd type="none" w="med" len="med"/>
+                    </a:lnL>
+                    <a:lnR w="12700" cap="flat" cmpd="sng" algn="ctr">
+                      <a:solidFill>
+                        <a:srgbClr val="E3E0EC"/>
+                      </a:solidFill>
+                      <a:prstDash val="solid"/>
+                      <a:round/>
+                      <a:headEnd type="none" w="med" len="med"/>
+                      <a:tailEnd type="none" w="med" len="med"/>
+                    </a:lnR>
+                    <a:lnT w="12700" cap="flat" cmpd="sng" algn="ctr">
+                      <a:solidFill>
+                        <a:srgbClr val="E3E0EC"/>
+                      </a:solidFill>
+                      <a:prstDash val="solid"/>
+                      <a:round/>
+                      <a:headEnd type="none" w="med" len="med"/>
+                      <a:tailEnd type="none" w="med" len="med"/>
+                    </a:lnT>
+                    <a:lnB w="12700" cap="flat" cmpd="sng" algn="ctr">
+                      <a:solidFill>
+                        <a:srgbClr val="E3E0EC"/>
+                      </a:solidFill>
+                      <a:prstDash val="solid"/>
+                      <a:round/>
+                      <a:headEnd type="none" w="med" len="med"/>
+                      <a:tailEnd type="none" w="med" len="med"/>
+                    </a:lnB>
+                  </a:tcPr>
+                </a:tc>
+                <a:tc>
+                  <a:txBody>
+                    <a:bodyPr/>
+                    <a:lstStyle/>
+                    <a:p>
+                      <a:pPr indent="0" marL="0">
+                        <a:buNone/>
+                      </a:pPr>
+                      <a:r>
+                        <a:rPr lang="en-US" sz="1250" dirty="0">
+                          <a:solidFill>
+                            <a:srgbClr val="000000"/>
+                          </a:solidFill>
+                          <a:latin typeface="Calibri" pitchFamily="34" charset="0"/>
+                          <a:ea typeface="Calibri" pitchFamily="34" charset="-122"/>
+                          <a:cs typeface="Calibri" pitchFamily="34" charset="-120"/>
+                        </a:rPr>
+                        <a:t>220 nm</a:t>
+                      </a:r>
+                      <a:endParaRPr lang="en-US" sz="1250" dirty="0">
+                        <a:latin typeface="Calibri" charset="0"/>
+                        <a:ea typeface="Calibri" charset="0"/>
+                        <a:cs typeface="Calibri" charset="0"/>
+                      </a:endParaRPr>
+                    </a:p>
+                  </a:txBody>
+                  <a:tcPr marL="91440" marR="91440" marT="45720" marB="45720" anchor="ctr">
+                    <a:lnL w="12700" cap="flat" cmpd="sng" algn="ctr">
+                      <a:solidFill>
+                        <a:srgbClr val="E3E0EC"/>
+                      </a:solidFill>
+                      <a:prstDash val="solid"/>
+                      <a:round/>
+                      <a:headEnd type="none" w="med" len="med"/>
+                      <a:tailEnd type="none" w="med" len="med"/>
+                    </a:lnL>
+                    <a:lnR w="12700" cap="flat" cmpd="sng" algn="ctr">
+                      <a:solidFill>
+                        <a:srgbClr val="E3E0EC"/>
+                      </a:solidFill>
+                      <a:prstDash val="solid"/>
+                      <a:round/>
+                      <a:headEnd type="none" w="med" len="med"/>
+                      <a:tailEnd type="none" w="med" len="med"/>
+                    </a:lnR>
+                    <a:lnT w="12700" cap="flat" cmpd="sng" algn="ctr">
+                      <a:solidFill>
+                        <a:srgbClr val="E3E0EC"/>
+                      </a:solidFill>
+                      <a:prstDash val="solid"/>
+                      <a:round/>
+                      <a:headEnd type="none" w="med" len="med"/>
+                      <a:tailEnd type="none" w="med" len="med"/>
+                    </a:lnT>
+                    <a:lnB w="12700" cap="flat" cmpd="sng" algn="ctr">
+                      <a:solidFill>
+                        <a:srgbClr val="E3E0EC"/>
+                      </a:solidFill>
+                      <a:prstDash val="solid"/>
+                      <a:round/>
+                      <a:headEnd type="none" w="med" len="med"/>
+                      <a:tailEnd type="none" w="med" len="med"/>
+                    </a:lnB>
+                  </a:tcPr>
+                </a:tc>
+                <a:tc>
+                  <a:txBody>
+                    <a:bodyPr/>
+                    <a:lstStyle/>
+                    <a:p>
+                      <a:pPr indent="0" marL="0">
+                        <a:buNone/>
+                      </a:pPr>
+                      <a:r>
+                        <a:rPr lang="en-US" sz="1250" dirty="0">
+                          <a:solidFill>
+                            <a:srgbClr val="000000"/>
+                          </a:solidFill>
+                          <a:latin typeface="Calibri" pitchFamily="34" charset="0"/>
+                          <a:ea typeface="Calibri" pitchFamily="34" charset="-122"/>
+                          <a:cs typeface="Calibri" pitchFamily="34" charset="-120"/>
+                        </a:rPr>
+                        <a:t>+14.1°</a:t>
+                      </a:r>
+                      <a:endParaRPr lang="en-US" sz="1250" dirty="0">
+                        <a:latin typeface="Calibri" charset="0"/>
+                        <a:ea typeface="Calibri" charset="0"/>
+                        <a:cs typeface="Calibri" charset="0"/>
+                      </a:endParaRPr>
+                    </a:p>
+                  </a:txBody>
+                  <a:tcPr marL="91440" marR="91440" marT="45720" marB="45720" anchor="ctr">
+                    <a:lnL w="12700" cap="flat" cmpd="sng" algn="ctr">
+                      <a:solidFill>
+                        <a:srgbClr val="E3E0EC"/>
+                      </a:solidFill>
+                      <a:prstDash val="solid"/>
+                      <a:round/>
+                      <a:headEnd type="none" w="med" len="med"/>
+                      <a:tailEnd type="none" w="med" len="med"/>
+                    </a:lnL>
+                    <a:lnR w="12700" cap="flat" cmpd="sng" algn="ctr">
+                      <a:solidFill>
+                        <a:srgbClr val="E3E0EC"/>
+                      </a:solidFill>
+                      <a:prstDash val="solid"/>
+                      <a:round/>
+                      <a:headEnd type="none" w="med" len="med"/>
+                      <a:tailEnd type="none" w="med" len="med"/>
+                    </a:lnR>
+                    <a:lnT w="12700" cap="flat" cmpd="sng" algn="ctr">
+                      <a:solidFill>
+                        <a:srgbClr val="E3E0EC"/>
+                      </a:solidFill>
+                      <a:prstDash val="solid"/>
+                      <a:round/>
+                      <a:headEnd type="none" w="med" len="med"/>
+                      <a:tailEnd type="none" w="med" len="med"/>
+                    </a:lnT>
+                    <a:lnB w="12700" cap="flat" cmpd="sng" algn="ctr">
+                      <a:solidFill>
+                        <a:srgbClr val="E3E0EC"/>
+                      </a:solidFill>
+                      <a:prstDash val="solid"/>
+                      <a:round/>
+                      <a:headEnd type="none" w="med" len="med"/>
+                      <a:tailEnd type="none" w="med" len="med"/>
+                    </a:lnB>
+                  </a:tcPr>
+                </a:tc>
+                <a:tc>
+                  <a:txBody>
+                    <a:bodyPr/>
+                    <a:lstStyle/>
+                    <a:p>
+                      <a:pPr indent="0" marL="0">
+                        <a:buNone/>
+                      </a:pPr>
+                      <a:r>
+                        <a:rPr lang="en-US" sz="1250" dirty="0">
+                          <a:solidFill>
+                            <a:srgbClr val="000000"/>
+                          </a:solidFill>
+                          <a:latin typeface="Calibri" pitchFamily="34" charset="0"/>
+                          <a:ea typeface="Calibri" pitchFamily="34" charset="-122"/>
+                          <a:cs typeface="Calibri" pitchFamily="34" charset="-120"/>
+                        </a:rPr>
+                        <a:t>yes, grazing</a:t>
+                      </a:r>
+                      <a:endParaRPr lang="en-US" sz="1250" dirty="0">
+                        <a:latin typeface="Calibri" charset="0"/>
+                        <a:ea typeface="Calibri" charset="0"/>
+                        <a:cs typeface="Calibri" charset="0"/>
+                      </a:endParaRPr>
+                    </a:p>
+                  </a:txBody>
+                  <a:tcPr marL="91440" marR="91440" marT="45720" marB="45720" anchor="ctr">
+                    <a:lnL w="12700" cap="flat" cmpd="sng" algn="ctr">
+                      <a:solidFill>
+                        <a:srgbClr val="E3E0EC"/>
+                      </a:solidFill>
+                      <a:prstDash val="solid"/>
+                      <a:round/>
+                      <a:headEnd type="none" w="med" len="med"/>
+                      <a:tailEnd type="none" w="med" len="med"/>
+                    </a:lnL>
+                    <a:lnR w="12700" cap="flat" cmpd="sng" algn="ctr">
+                      <a:solidFill>
+                        <a:srgbClr val="E3E0EC"/>
+                      </a:solidFill>
+                      <a:prstDash val="solid"/>
+                      <a:round/>
+                      <a:headEnd type="none" w="med" len="med"/>
+                      <a:tailEnd type="none" w="med" len="med"/>
+                    </a:lnR>
+                    <a:lnT w="12700" cap="flat" cmpd="sng" algn="ctr">
+                      <a:solidFill>
+                        <a:srgbClr val="E3E0EC"/>
+                      </a:solidFill>
+                      <a:prstDash val="solid"/>
+                      <a:round/>
+                      <a:headEnd type="none" w="med" len="med"/>
+                      <a:tailEnd type="none" w="med" len="med"/>
+                    </a:lnT>
+                    <a:lnB w="12700" cap="flat" cmpd="sng" algn="ctr">
+                      <a:solidFill>
+                        <a:srgbClr val="E3E0EC"/>
+                      </a:solidFill>
+                      <a:prstDash val="solid"/>
+                      <a:round/>
+                      <a:headEnd type="none" w="med" len="med"/>
+                      <a:tailEnd type="none" w="med" len="med"/>
+                    </a:lnB>
+                  </a:tcPr>
+                </a:tc>
+              </a:tr>
+              <a:tr h="384048">
+                <a:tc>
+                  <a:txBody>
+                    <a:bodyPr/>
+                    <a:lstStyle/>
+                    <a:p>
+                      <a:pPr indent="0" marL="0">
+                        <a:buNone/>
+                      </a:pPr>
+                      <a:r>
+                        <a:rPr lang="en-US" sz="1250" dirty="0">
+                          <a:solidFill>
+                            <a:srgbClr val="000000"/>
+                          </a:solidFill>
+                          <a:latin typeface="Calibri" pitchFamily="34" charset="0"/>
+                          <a:ea typeface="Calibri" pitchFamily="34" charset="-122"/>
+                          <a:cs typeface="Calibri" pitchFamily="34" charset="-120"/>
+                        </a:rPr>
+                        <a:t>+1 / −2  the old answer</a:t>
+                      </a:r>
+                      <a:endParaRPr lang="en-US" sz="1250" dirty="0">
+                        <a:latin typeface="Calibri" charset="0"/>
+                        <a:ea typeface="Calibri" charset="0"/>
+                        <a:cs typeface="Calibri" charset="0"/>
+                      </a:endParaRPr>
+                    </a:p>
+                  </a:txBody>
+                  <a:tcPr marL="91440" marR="91440" marT="45720" marB="45720" anchor="ctr">
+                    <a:lnL w="12700" cap="flat" cmpd="sng" algn="ctr">
+                      <a:solidFill>
+                        <a:srgbClr val="E3E0EC"/>
+                      </a:solidFill>
+                      <a:prstDash val="solid"/>
+                      <a:round/>
+                      <a:headEnd type="none" w="med" len="med"/>
+                      <a:tailEnd type="none" w="med" len="med"/>
+                    </a:lnL>
+                    <a:lnR w="12700" cap="flat" cmpd="sng" algn="ctr">
+                      <a:solidFill>
+                        <a:srgbClr val="E3E0EC"/>
+                      </a:solidFill>
+                      <a:prstDash val="solid"/>
+                      <a:round/>
+                      <a:headEnd type="none" w="med" len="med"/>
+                      <a:tailEnd type="none" w="med" len="med"/>
+                    </a:lnR>
+                    <a:lnT w="12700" cap="flat" cmpd="sng" algn="ctr">
+                      <a:solidFill>
+                        <a:srgbClr val="E3E0EC"/>
+                      </a:solidFill>
+                      <a:prstDash val="solid"/>
+                      <a:round/>
+                      <a:headEnd type="none" w="med" len="med"/>
+                      <a:tailEnd type="none" w="med" len="med"/>
+                    </a:lnT>
+                    <a:lnB w="12700" cap="flat" cmpd="sng" algn="ctr">
+                      <a:solidFill>
+                        <a:srgbClr val="E3E0EC"/>
+                      </a:solidFill>
+                      <a:prstDash val="solid"/>
+                      <a:round/>
+                      <a:headEnd type="none" w="med" len="med"/>
+                      <a:tailEnd type="none" w="med" len="med"/>
+                    </a:lnB>
+                  </a:tcPr>
+                </a:tc>
+                <a:tc>
+                  <a:txBody>
+                    <a:bodyPr/>
+                    <a:lstStyle/>
+                    <a:p>
+                      <a:pPr indent="0" marL="0">
+                        <a:buNone/>
+                      </a:pPr>
+                      <a:r>
+                        <a:rPr lang="en-US" sz="1250" dirty="0">
+                          <a:solidFill>
+                            <a:srgbClr val="000000"/>
+                          </a:solidFill>
+                          <a:latin typeface="Calibri" pitchFamily="34" charset="0"/>
+                          <a:ea typeface="Calibri" pitchFamily="34" charset="-122"/>
+                          <a:cs typeface="Calibri" pitchFamily="34" charset="-120"/>
+                        </a:rPr>
+                        <a:t>221 nm</a:t>
+                      </a:r>
+                      <a:endParaRPr lang="en-US" sz="1250" dirty="0">
+                        <a:latin typeface="Calibri" charset="0"/>
+                        <a:ea typeface="Calibri" charset="0"/>
+                        <a:cs typeface="Calibri" charset="0"/>
+                      </a:endParaRPr>
+                    </a:p>
+                  </a:txBody>
+                  <a:tcPr marL="91440" marR="91440" marT="45720" marB="45720" anchor="ctr">
+                    <a:lnL w="12700" cap="flat" cmpd="sng" algn="ctr">
+                      <a:solidFill>
+                        <a:srgbClr val="E3E0EC"/>
+                      </a:solidFill>
+                      <a:prstDash val="solid"/>
+                      <a:round/>
+                      <a:headEnd type="none" w="med" len="med"/>
+                      <a:tailEnd type="none" w="med" len="med"/>
+                    </a:lnL>
+                    <a:lnR w="12700" cap="flat" cmpd="sng" algn="ctr">
+                      <a:solidFill>
+                        <a:srgbClr val="E3E0EC"/>
+                      </a:solidFill>
+                      <a:prstDash val="solid"/>
+                      <a:round/>
+                      <a:headEnd type="none" w="med" len="med"/>
+                      <a:tailEnd type="none" w="med" len="med"/>
+                    </a:lnR>
+                    <a:lnT w="12700" cap="flat" cmpd="sng" algn="ctr">
+                      <a:solidFill>
+                        <a:srgbClr val="E3E0EC"/>
+                      </a:solidFill>
+                      <a:prstDash val="solid"/>
+                      <a:round/>
+                      <a:headEnd type="none" w="med" len="med"/>
+                      <a:tailEnd type="none" w="med" len="med"/>
+                    </a:lnT>
+                    <a:lnB w="12700" cap="flat" cmpd="sng" algn="ctr">
+                      <a:solidFill>
+                        <a:srgbClr val="E3E0EC"/>
+                      </a:solidFill>
+                      <a:prstDash val="solid"/>
+                      <a:round/>
+                      <a:headEnd type="none" w="med" len="med"/>
+                      <a:tailEnd type="none" w="med" len="med"/>
+                    </a:lnB>
+                  </a:tcPr>
+                </a:tc>
+                <a:tc>
+                  <a:txBody>
+                    <a:bodyPr/>
+                    <a:lstStyle/>
+                    <a:p>
+                      <a:pPr indent="0" marL="0">
+                        <a:buNone/>
+                      </a:pPr>
+                      <a:r>
+                        <a:rPr lang="en-US" sz="1250" dirty="0">
+                          <a:solidFill>
+                            <a:srgbClr val="000000"/>
+                          </a:solidFill>
+                          <a:latin typeface="Calibri" pitchFamily="34" charset="0"/>
+                          <a:ea typeface="Calibri" pitchFamily="34" charset="-122"/>
+                          <a:cs typeface="Calibri" pitchFamily="34" charset="-120"/>
+                        </a:rPr>
+                        <a:t>+4.4°</a:t>
+                      </a:r>
+                      <a:endParaRPr lang="en-US" sz="1250" dirty="0">
+                        <a:latin typeface="Calibri" charset="0"/>
+                        <a:ea typeface="Calibri" charset="0"/>
+                        <a:cs typeface="Calibri" charset="0"/>
+                      </a:endParaRPr>
+                    </a:p>
+                  </a:txBody>
+                  <a:tcPr marL="91440" marR="91440" marT="45720" marB="45720" anchor="ctr">
+                    <a:lnL w="12700" cap="flat" cmpd="sng" algn="ctr">
+                      <a:solidFill>
+                        <a:srgbClr val="E3E0EC"/>
+                      </a:solidFill>
+                      <a:prstDash val="solid"/>
+                      <a:round/>
+                      <a:headEnd type="none" w="med" len="med"/>
+                      <a:tailEnd type="none" w="med" len="med"/>
+                    </a:lnL>
+                    <a:lnR w="12700" cap="flat" cmpd="sng" algn="ctr">
+                      <a:solidFill>
+                        <a:srgbClr val="E3E0EC"/>
+                      </a:solidFill>
+                      <a:prstDash val="solid"/>
+                      <a:round/>
+                      <a:headEnd type="none" w="med" len="med"/>
+                      <a:tailEnd type="none" w="med" len="med"/>
+                    </a:lnR>
+                    <a:lnT w="12700" cap="flat" cmpd="sng" algn="ctr">
+                      <a:solidFill>
+                        <a:srgbClr val="E3E0EC"/>
+                      </a:solidFill>
+                      <a:prstDash val="solid"/>
+                      <a:round/>
+                      <a:headEnd type="none" w="med" len="med"/>
+                      <a:tailEnd type="none" w="med" len="med"/>
+                    </a:lnT>
+                    <a:lnB w="12700" cap="flat" cmpd="sng" algn="ctr">
+                      <a:solidFill>
+                        <a:srgbClr val="E3E0EC"/>
+                      </a:solidFill>
+                      <a:prstDash val="solid"/>
+                      <a:round/>
+                      <a:headEnd type="none" w="med" len="med"/>
+                      <a:tailEnd type="none" w="med" len="med"/>
+                    </a:lnB>
+                  </a:tcPr>
+                </a:tc>
+                <a:tc>
+                  <a:txBody>
+                    <a:bodyPr/>
+                    <a:lstStyle/>
+                    <a:p>
+                      <a:pPr indent="0" marL="0">
+                        <a:buNone/>
+                      </a:pPr>
+                      <a:r>
+                        <a:rPr lang="en-US" sz="1250" dirty="0">
+                          <a:solidFill>
+                            <a:srgbClr val="000000"/>
+                          </a:solidFill>
+                          <a:latin typeface="Calibri" pitchFamily="34" charset="0"/>
+                          <a:ea typeface="Calibri" pitchFamily="34" charset="-122"/>
+                          <a:cs typeface="Calibri" pitchFamily="34" charset="-120"/>
+                        </a:rPr>
+                        <a:t>NO</a:t>
+                      </a:r>
+                      <a:endParaRPr lang="en-US" sz="1250" dirty="0">
+                        <a:latin typeface="Calibri" charset="0"/>
+                        <a:ea typeface="Calibri" charset="0"/>
+                        <a:cs typeface="Calibri" charset="0"/>
+                      </a:endParaRPr>
+                    </a:p>
+                  </a:txBody>
+                  <a:tcPr marL="91440" marR="91440" marT="45720" marB="45720" anchor="ctr">
+                    <a:lnL w="12700" cap="flat" cmpd="sng" algn="ctr">
+                      <a:solidFill>
+                        <a:srgbClr val="E3E0EC"/>
+                      </a:solidFill>
+                      <a:prstDash val="solid"/>
+                      <a:round/>
+                      <a:headEnd type="none" w="med" len="med"/>
+                      <a:tailEnd type="none" w="med" len="med"/>
+                    </a:lnL>
+                    <a:lnR w="12700" cap="flat" cmpd="sng" algn="ctr">
+                      <a:solidFill>
+                        <a:srgbClr val="E3E0EC"/>
+                      </a:solidFill>
+                      <a:prstDash val="solid"/>
+                      <a:round/>
+                      <a:headEnd type="none" w="med" len="med"/>
+                      <a:tailEnd type="none" w="med" len="med"/>
+                    </a:lnR>
+                    <a:lnT w="12700" cap="flat" cmpd="sng" algn="ctr">
+                      <a:solidFill>
+                        <a:srgbClr val="E3E0EC"/>
+                      </a:solidFill>
+                      <a:prstDash val="solid"/>
+                      <a:round/>
+                      <a:headEnd type="none" w="med" len="med"/>
+                      <a:tailEnd type="none" w="med" len="med"/>
+                    </a:lnT>
+                    <a:lnB w="12700" cap="flat" cmpd="sng" algn="ctr">
+                      <a:solidFill>
+                        <a:srgbClr val="E3E0EC"/>
+                      </a:solidFill>
+                      <a:prstDash val="solid"/>
+                      <a:round/>
+                      <a:headEnd type="none" w="med" len="med"/>
+                      <a:tailEnd type="none" w="med" len="med"/>
+                    </a:lnB>
+                  </a:tcPr>
+                </a:tc>
+              </a:tr>
+              <a:tr h="384048">
+                <a:tc>
+                  <a:txBody>
+                    <a:bodyPr/>
+                    <a:lstStyle/>
+                    <a:p>
+                      <a:pPr indent="0" marL="0">
+                        <a:buNone/>
+                      </a:pPr>
+                      <a:r>
+                        <a:rPr lang="en-US" sz="1250" dirty="0">
+                          <a:solidFill>
+                            <a:srgbClr val="000000"/>
+                          </a:solidFill>
+                          <a:latin typeface="Calibri" pitchFamily="34" charset="0"/>
+                          <a:ea typeface="Calibri" pitchFamily="34" charset="-122"/>
+                          <a:cs typeface="Calibri" pitchFamily="34" charset="-120"/>
+                        </a:rPr>
+                        <a:t>+0 / −2</a:t>
+                      </a:r>
+                      <a:endParaRPr lang="en-US" sz="1250" dirty="0">
+                        <a:latin typeface="Calibri" charset="0"/>
+                        <a:ea typeface="Calibri" charset="0"/>
+                        <a:cs typeface="Calibri" charset="0"/>
+                      </a:endParaRPr>
+                    </a:p>
+                  </a:txBody>
+                  <a:tcPr marL="91440" marR="91440" marT="45720" marB="45720" anchor="ctr">
+                    <a:lnL w="12700" cap="flat" cmpd="sng" algn="ctr">
+                      <a:solidFill>
+                        <a:srgbClr val="E3E0EC"/>
+                      </a:solidFill>
+                      <a:prstDash val="solid"/>
+                      <a:round/>
+                      <a:headEnd type="none" w="med" len="med"/>
+                      <a:tailEnd type="none" w="med" len="med"/>
+                    </a:lnL>
+                    <a:lnR w="12700" cap="flat" cmpd="sng" algn="ctr">
+                      <a:solidFill>
+                        <a:srgbClr val="E3E0EC"/>
+                      </a:solidFill>
+                      <a:prstDash val="solid"/>
+                      <a:round/>
+                      <a:headEnd type="none" w="med" len="med"/>
+                      <a:tailEnd type="none" w="med" len="med"/>
+                    </a:lnR>
+                    <a:lnT w="12700" cap="flat" cmpd="sng" algn="ctr">
+                      <a:solidFill>
+                        <a:srgbClr val="E3E0EC"/>
+                      </a:solidFill>
+                      <a:prstDash val="solid"/>
+                      <a:round/>
+                      <a:headEnd type="none" w="med" len="med"/>
+                      <a:tailEnd type="none" w="med" len="med"/>
+                    </a:lnT>
+                    <a:lnB w="12700" cap="flat" cmpd="sng" algn="ctr">
+                      <a:solidFill>
+                        <a:srgbClr val="E3E0EC"/>
+                      </a:solidFill>
+                      <a:prstDash val="solid"/>
+                      <a:round/>
+                      <a:headEnd type="none" w="med" len="med"/>
+                      <a:tailEnd type="none" w="med" len="med"/>
+                    </a:lnB>
+                  </a:tcPr>
+                </a:tc>
+                <a:tc>
+                  <a:txBody>
+                    <a:bodyPr/>
+                    <a:lstStyle/>
+                    <a:p>
+                      <a:pPr indent="0" marL="0">
+                        <a:buNone/>
+                      </a:pPr>
+                      <a:r>
+                        <a:rPr lang="en-US" sz="1250" dirty="0">
+                          <a:solidFill>
+                            <a:srgbClr val="000000"/>
+                          </a:solidFill>
+                          <a:latin typeface="Calibri" pitchFamily="34" charset="0"/>
+                          <a:ea typeface="Calibri" pitchFamily="34" charset="-122"/>
+                          <a:cs typeface="Calibri" pitchFamily="34" charset="-120"/>
+                        </a:rPr>
+                        <a:t>222 nm</a:t>
+                      </a:r>
+                      <a:endParaRPr lang="en-US" sz="1250" dirty="0">
+                        <a:latin typeface="Calibri" charset="0"/>
+                        <a:ea typeface="Calibri" charset="0"/>
+                        <a:cs typeface="Calibri" charset="0"/>
+                      </a:endParaRPr>
+                    </a:p>
+                  </a:txBody>
+                  <a:tcPr marL="91440" marR="91440" marT="45720" marB="45720" anchor="ctr">
+                    <a:lnL w="12700" cap="flat" cmpd="sng" algn="ctr">
+                      <a:solidFill>
+                        <a:srgbClr val="E3E0EC"/>
+                      </a:solidFill>
+                      <a:prstDash val="solid"/>
+                      <a:round/>
+                      <a:headEnd type="none" w="med" len="med"/>
+                      <a:tailEnd type="none" w="med" len="med"/>
+                    </a:lnL>
+                    <a:lnR w="12700" cap="flat" cmpd="sng" algn="ctr">
+                      <a:solidFill>
+                        <a:srgbClr val="E3E0EC"/>
+                      </a:solidFill>
+                      <a:prstDash val="solid"/>
+                      <a:round/>
+                      <a:headEnd type="none" w="med" len="med"/>
+                      <a:tailEnd type="none" w="med" len="med"/>
+                    </a:lnR>
+                    <a:lnT w="12700" cap="flat" cmpd="sng" algn="ctr">
+                      <a:solidFill>
+                        <a:srgbClr val="E3E0EC"/>
+                      </a:solidFill>
+                      <a:prstDash val="solid"/>
+                      <a:round/>
+                      <a:headEnd type="none" w="med" len="med"/>
+                      <a:tailEnd type="none" w="med" len="med"/>
+                    </a:lnT>
+                    <a:lnB w="12700" cap="flat" cmpd="sng" algn="ctr">
+                      <a:solidFill>
+                        <a:srgbClr val="E3E0EC"/>
+                      </a:solidFill>
+                      <a:prstDash val="solid"/>
+                      <a:round/>
+                      <a:headEnd type="none" w="med" len="med"/>
+                      <a:tailEnd type="none" w="med" len="med"/>
+                    </a:lnB>
+                  </a:tcPr>
+                </a:tc>
+                <a:tc>
+                  <a:txBody>
+                    <a:bodyPr/>
+                    <a:lstStyle/>
+                    <a:p>
+                      <a:pPr indent="0" marL="0">
+                        <a:buNone/>
+                      </a:pPr>
+                      <a:r>
+                        <a:rPr lang="en-US" sz="1250" dirty="0">
+                          <a:solidFill>
+                            <a:srgbClr val="000000"/>
+                          </a:solidFill>
+                          <a:latin typeface="Calibri" pitchFamily="34" charset="0"/>
+                          <a:ea typeface="Calibri" pitchFamily="34" charset="-122"/>
+                          <a:cs typeface="Calibri" pitchFamily="34" charset="-120"/>
+                        </a:rPr>
+                        <a:t>+2.6°</a:t>
+                      </a:r>
+                      <a:endParaRPr lang="en-US" sz="1250" dirty="0">
+                        <a:latin typeface="Calibri" charset="0"/>
+                        <a:ea typeface="Calibri" charset="0"/>
+                        <a:cs typeface="Calibri" charset="0"/>
+                      </a:endParaRPr>
+                    </a:p>
+                  </a:txBody>
+                  <a:tcPr marL="91440" marR="91440" marT="45720" marB="45720" anchor="ctr">
+                    <a:lnL w="12700" cap="flat" cmpd="sng" algn="ctr">
+                      <a:solidFill>
+                        <a:srgbClr val="E3E0EC"/>
+                      </a:solidFill>
+                      <a:prstDash val="solid"/>
+                      <a:round/>
+                      <a:headEnd type="none" w="med" len="med"/>
+                      <a:tailEnd type="none" w="med" len="med"/>
+                    </a:lnL>
+                    <a:lnR w="12700" cap="flat" cmpd="sng" algn="ctr">
+                      <a:solidFill>
+                        <a:srgbClr val="E3E0EC"/>
+                      </a:solidFill>
+                      <a:prstDash val="solid"/>
+                      <a:round/>
+                      <a:headEnd type="none" w="med" len="med"/>
+                      <a:tailEnd type="none" w="med" len="med"/>
+                    </a:lnR>
+                    <a:lnT w="12700" cap="flat" cmpd="sng" algn="ctr">
+                      <a:solidFill>
+                        <a:srgbClr val="E3E0EC"/>
+                      </a:solidFill>
+                      <a:prstDash val="solid"/>
+                      <a:round/>
+                      <a:headEnd type="none" w="med" len="med"/>
+                      <a:tailEnd type="none" w="med" len="med"/>
+                    </a:lnT>
+                    <a:lnB w="12700" cap="flat" cmpd="sng" algn="ctr">
+                      <a:solidFill>
+                        <a:srgbClr val="E3E0EC"/>
+                      </a:solidFill>
+                      <a:prstDash val="solid"/>
+                      <a:round/>
+                      <a:headEnd type="none" w="med" len="med"/>
+                      <a:tailEnd type="none" w="med" len="med"/>
+                    </a:lnB>
+                  </a:tcPr>
+                </a:tc>
+                <a:tc>
+                  <a:txBody>
+                    <a:bodyPr/>
+                    <a:lstStyle/>
+                    <a:p>
+                      <a:pPr indent="0" marL="0">
+                        <a:buNone/>
+                      </a:pPr>
+                      <a:r>
+                        <a:rPr lang="en-US" sz="1250" dirty="0">
+                          <a:solidFill>
+                            <a:srgbClr val="000000"/>
+                          </a:solidFill>
+                          <a:latin typeface="Calibri" pitchFamily="34" charset="0"/>
+                          <a:ea typeface="Calibri" pitchFamily="34" charset="-122"/>
+                          <a:cs typeface="Calibri" pitchFamily="34" charset="-120"/>
+                        </a:rPr>
+                        <a:t>NO</a:t>
+                      </a:r>
+                      <a:endParaRPr lang="en-US" sz="1250" dirty="0">
+                        <a:latin typeface="Calibri" charset="0"/>
+                        <a:ea typeface="Calibri" charset="0"/>
+                        <a:cs typeface="Calibri" charset="0"/>
+                      </a:endParaRPr>
+                    </a:p>
+                  </a:txBody>
+                  <a:tcPr marL="91440" marR="91440" marT="45720" marB="45720" anchor="ctr">
+                    <a:lnL w="12700" cap="flat" cmpd="sng" algn="ctr">
+                      <a:solidFill>
+                        <a:srgbClr val="E3E0EC"/>
+                      </a:solidFill>
+                      <a:prstDash val="solid"/>
+                      <a:round/>
+                      <a:headEnd type="none" w="med" len="med"/>
+                      <a:tailEnd type="none" w="med" len="med"/>
+                    </a:lnL>
+                    <a:lnR w="12700" cap="flat" cmpd="sng" algn="ctr">
+                      <a:solidFill>
+                        <a:srgbClr val="E3E0EC"/>
+                      </a:solidFill>
+                      <a:prstDash val="solid"/>
+                      <a:round/>
+                      <a:headEnd type="none" w="med" len="med"/>
+                      <a:tailEnd type="none" w="med" len="med"/>
+                    </a:lnR>
+                    <a:lnT w="12700" cap="flat" cmpd="sng" algn="ctr">
+                      <a:solidFill>
+                        <a:srgbClr val="E3E0EC"/>
+                      </a:solidFill>
+                      <a:prstDash val="solid"/>
+                      <a:round/>
+                      <a:headEnd type="none" w="med" len="med"/>
+                      <a:tailEnd type="none" w="med" len="med"/>
+                    </a:lnT>
+                    <a:lnB w="12700" cap="flat" cmpd="sng" algn="ctr">
+                      <a:solidFill>
+                        <a:srgbClr val="E3E0EC"/>
+                      </a:solidFill>
+                      <a:prstDash val="solid"/>
+                      <a:round/>
+                      <a:headEnd type="none" w="med" len="med"/>
+                      <a:tailEnd type="none" w="med" len="med"/>
+                    </a:lnB>
+                  </a:tcPr>
+                </a:tc>
+              </a:tr>
+              <a:tr h="384048">
+                <a:tc>
+                  <a:txBody>
+                    <a:bodyPr/>
+                    <a:lstStyle/>
+                    <a:p>
+                      <a:pPr indent="0" marL="0">
+                        <a:buNone/>
+                      </a:pPr>
+                      <a:r>
+                        <a:rPr lang="en-US" sz="1250" dirty="0">
+                          <a:solidFill>
+                            <a:srgbClr val="000000"/>
+                          </a:solidFill>
+                          <a:latin typeface="Calibri" pitchFamily="34" charset="0"/>
+                          <a:ea typeface="Calibri" pitchFamily="34" charset="-122"/>
+                          <a:cs typeface="Calibri" pitchFamily="34" charset="-120"/>
+                        </a:rPr>
+                        <a:t>measured</a:t>
+                      </a:r>
+                      <a:endParaRPr lang="en-US" sz="1250" dirty="0">
+                        <a:latin typeface="Calibri" charset="0"/>
+                        <a:ea typeface="Calibri" charset="0"/>
+                        <a:cs typeface="Calibri" charset="0"/>
+                      </a:endParaRPr>
+                    </a:p>
+                  </a:txBody>
+                  <a:tcPr marL="91440" marR="91440" marT="45720" marB="45720" anchor="ctr">
+                    <a:lnL w="12700" cap="flat" cmpd="sng" algn="ctr">
+                      <a:solidFill>
+                        <a:srgbClr val="E3E0EC"/>
+                      </a:solidFill>
+                      <a:prstDash val="solid"/>
+                      <a:round/>
+                      <a:headEnd type="none" w="med" len="med"/>
+                      <a:tailEnd type="none" w="med" len="med"/>
+                    </a:lnL>
+                    <a:lnR w="12700" cap="flat" cmpd="sng" algn="ctr">
+                      <a:solidFill>
+                        <a:srgbClr val="E3E0EC"/>
+                      </a:solidFill>
+                      <a:prstDash val="solid"/>
+                      <a:round/>
+                      <a:headEnd type="none" w="med" len="med"/>
+                      <a:tailEnd type="none" w="med" len="med"/>
+                    </a:lnR>
+                    <a:lnT w="12700" cap="flat" cmpd="sng" algn="ctr">
+                      <a:solidFill>
+                        <a:srgbClr val="E3E0EC"/>
+                      </a:solidFill>
+                      <a:prstDash val="solid"/>
+                      <a:round/>
+                      <a:headEnd type="none" w="med" len="med"/>
+                      <a:tailEnd type="none" w="med" len="med"/>
+                    </a:lnT>
+                    <a:lnB w="12700" cap="flat" cmpd="sng" algn="ctr">
+                      <a:solidFill>
+                        <a:srgbClr val="E3E0EC"/>
+                      </a:solidFill>
+                      <a:prstDash val="solid"/>
+                      <a:round/>
+                      <a:headEnd type="none" w="med" len="med"/>
+                      <a:tailEnd type="none" w="med" len="med"/>
+                    </a:lnB>
+                  </a:tcPr>
+                </a:tc>
+                <a:tc>
+                  <a:txBody>
+                    <a:bodyPr/>
+                    <a:lstStyle/>
+                    <a:p>
+                      <a:pPr indent="0" marL="0">
+                        <a:buNone/>
+                      </a:pPr>
+                      <a:r>
+                        <a:rPr lang="en-US" sz="1250" dirty="0">
+                          <a:solidFill>
+                            <a:srgbClr val="000000"/>
+                          </a:solidFill>
+                          <a:latin typeface="Calibri" pitchFamily="34" charset="0"/>
+                          <a:ea typeface="Calibri" pitchFamily="34" charset="-122"/>
+                          <a:cs typeface="Calibri" pitchFamily="34" charset="-120"/>
+                        </a:rPr>
+                        <a:t>216 nm</a:t>
+                      </a:r>
+                      <a:endParaRPr lang="en-US" sz="1250" dirty="0">
+                        <a:latin typeface="Calibri" charset="0"/>
+                        <a:ea typeface="Calibri" charset="0"/>
+                        <a:cs typeface="Calibri" charset="0"/>
+                      </a:endParaRPr>
+                    </a:p>
+                  </a:txBody>
+                  <a:tcPr marL="91440" marR="91440" marT="45720" marB="45720" anchor="ctr">
+                    <a:lnL w="12700" cap="flat" cmpd="sng" algn="ctr">
+                      <a:solidFill>
+                        <a:srgbClr val="E3E0EC"/>
+                      </a:solidFill>
+                      <a:prstDash val="solid"/>
+                      <a:round/>
+                      <a:headEnd type="none" w="med" len="med"/>
+                      <a:tailEnd type="none" w="med" len="med"/>
+                    </a:lnL>
+                    <a:lnR w="12700" cap="flat" cmpd="sng" algn="ctr">
+                      <a:solidFill>
+                        <a:srgbClr val="E3E0EC"/>
+                      </a:solidFill>
+                      <a:prstDash val="solid"/>
+                      <a:round/>
+                      <a:headEnd type="none" w="med" len="med"/>
+                      <a:tailEnd type="none" w="med" len="med"/>
+                    </a:lnR>
+                    <a:lnT w="12700" cap="flat" cmpd="sng" algn="ctr">
+                      <a:solidFill>
+                        <a:srgbClr val="E3E0EC"/>
+                      </a:solidFill>
+                      <a:prstDash val="solid"/>
+                      <a:round/>
+                      <a:headEnd type="none" w="med" len="med"/>
+                      <a:tailEnd type="none" w="med" len="med"/>
+                    </a:lnT>
+                    <a:lnB w="12700" cap="flat" cmpd="sng" algn="ctr">
+                      <a:solidFill>
+                        <a:srgbClr val="E3E0EC"/>
+                      </a:solidFill>
+                      <a:prstDash val="solid"/>
+                      <a:round/>
+                      <a:headEnd type="none" w="med" len="med"/>
+                      <a:tailEnd type="none" w="med" len="med"/>
+                    </a:lnB>
+                  </a:tcPr>
+                </a:tc>
+                <a:tc>
+                  <a:txBody>
+                    <a:bodyPr/>
+                    <a:lstStyle/>
+                    <a:p>
+                      <a:pPr indent="0" marL="0">
+                        <a:buNone/>
+                      </a:pPr>
+                      <a:r>
+                        <a:rPr lang="en-US" sz="1250" dirty="0">
+                          <a:solidFill>
+                            <a:srgbClr val="000000"/>
+                          </a:solidFill>
+                          <a:latin typeface="Calibri" pitchFamily="34" charset="0"/>
+                          <a:ea typeface="Calibri" pitchFamily="34" charset="-122"/>
+                          <a:cs typeface="Calibri" pitchFamily="34" charset="-120"/>
+                        </a:rPr>
+                        <a:t>—</a:t>
+                      </a:r>
+                      <a:endParaRPr lang="en-US" sz="1250" dirty="0">
+                        <a:latin typeface="Calibri" charset="0"/>
+                        <a:ea typeface="Calibri" charset="0"/>
+                        <a:cs typeface="Calibri" charset="0"/>
+                      </a:endParaRPr>
+                    </a:p>
+                  </a:txBody>
+                  <a:tcPr marL="91440" marR="91440" marT="45720" marB="45720" anchor="ctr">
+                    <a:lnL w="12700" cap="flat" cmpd="sng" algn="ctr">
+                      <a:solidFill>
+                        <a:srgbClr val="E3E0EC"/>
+                      </a:solidFill>
+                      <a:prstDash val="solid"/>
+                      <a:round/>
+                      <a:headEnd type="none" w="med" len="med"/>
+                      <a:tailEnd type="none" w="med" len="med"/>
+                    </a:lnL>
+                    <a:lnR w="12700" cap="flat" cmpd="sng" algn="ctr">
+                      <a:solidFill>
+                        <a:srgbClr val="E3E0EC"/>
+                      </a:solidFill>
+                      <a:prstDash val="solid"/>
+                      <a:round/>
+                      <a:headEnd type="none" w="med" len="med"/>
+                      <a:tailEnd type="none" w="med" len="med"/>
+                    </a:lnR>
+                    <a:lnT w="12700" cap="flat" cmpd="sng" algn="ctr">
+                      <a:solidFill>
+                        <a:srgbClr val="E3E0EC"/>
+                      </a:solidFill>
+                      <a:prstDash val="solid"/>
+                      <a:round/>
+                      <a:headEnd type="none" w="med" len="med"/>
+                      <a:tailEnd type="none" w="med" len="med"/>
+                    </a:lnT>
+                    <a:lnB w="12700" cap="flat" cmpd="sng" algn="ctr">
+                      <a:solidFill>
+                        <a:srgbClr val="E3E0EC"/>
+                      </a:solidFill>
+                      <a:prstDash val="solid"/>
+                      <a:round/>
+                      <a:headEnd type="none" w="med" len="med"/>
+                      <a:tailEnd type="none" w="med" len="med"/>
+                    </a:lnB>
+                  </a:tcPr>
+                </a:tc>
+                <a:tc>
+                  <a:txBody>
+                    <a:bodyPr/>
+                    <a:lstStyle/>
+                    <a:p>
+                      <a:pPr indent="0" marL="0">
+                        <a:buNone/>
+                      </a:pPr>
+                      <a:r>
+                        <a:rPr lang="en-US" sz="1250" dirty="0">
+                          <a:solidFill>
+                            <a:srgbClr val="000000"/>
+                          </a:solidFill>
+                          <a:latin typeface="Calibri" pitchFamily="34" charset="0"/>
+                          <a:ea typeface="Calibri" pitchFamily="34" charset="-122"/>
+                          <a:cs typeface="Calibri" pitchFamily="34" charset="-120"/>
+                        </a:rPr>
+                        <a:t>—</a:t>
+                      </a:r>
+                      <a:endParaRPr lang="en-US" sz="1250" dirty="0">
+                        <a:latin typeface="Calibri" charset="0"/>
+                        <a:ea typeface="Calibri" charset="0"/>
+                        <a:cs typeface="Calibri" charset="0"/>
+                      </a:endParaRPr>
+                    </a:p>
+                  </a:txBody>
+                  <a:tcPr marL="91440" marR="91440" marT="45720" marB="45720" anchor="ctr">
+                    <a:lnL w="12700" cap="flat" cmpd="sng" algn="ctr">
+                      <a:solidFill>
+                        <a:srgbClr val="E3E0EC"/>
+                      </a:solidFill>
+                      <a:prstDash val="solid"/>
+                      <a:round/>
+                      <a:headEnd type="none" w="med" len="med"/>
+                      <a:tailEnd type="none" w="med" len="med"/>
+                    </a:lnL>
+                    <a:lnR w="12700" cap="flat" cmpd="sng" algn="ctr">
+                      <a:solidFill>
+                        <a:srgbClr val="E3E0EC"/>
+                      </a:solidFill>
+                      <a:prstDash val="solid"/>
+                      <a:round/>
+                      <a:headEnd type="none" w="med" len="med"/>
+                      <a:tailEnd type="none" w="med" len="med"/>
+                    </a:lnR>
+                    <a:lnT w="12700" cap="flat" cmpd="sng" algn="ctr">
+                      <a:solidFill>
+                        <a:srgbClr val="E3E0EC"/>
+                      </a:solidFill>
+                      <a:prstDash val="solid"/>
+                      <a:round/>
+                      <a:headEnd type="none" w="med" len="med"/>
+                      <a:tailEnd type="none" w="med" len="med"/>
+                    </a:lnT>
+                    <a:lnB w="12700" cap="flat" cmpd="sng" algn="ctr">
+                      <a:solidFill>
+                        <a:srgbClr val="E3E0EC"/>
+                      </a:solidFill>
+                      <a:prstDash val="solid"/>
+                      <a:round/>
+                      <a:headEnd type="none" w="med" len="med"/>
+                      <a:tailEnd type="none" w="med" len="med"/>
+                    </a:lnB>
+                  </a:tcPr>
+                </a:tc>
+              </a:tr>
+            </a:tbl>
+          </a:graphicData>
+        </a:graphic>
+      </p:graphicFrame>
+      <p:sp>
+        <p:nvSpPr>
+          <p:cNvPr id="7" name="Shape 3"/>
+          <p:cNvSpPr/>
+          <p:nvPr/>
+        </p:nvSpPr>
+        <p:spPr>
+          <a:xfrm>
+            <a:off x="640080" y="4709160"/>
+            <a:ext cx="10881360" cy="1234440"/>
+          </a:xfrm>
+          <a:prstGeom prst="roundRect">
+            <a:avLst>
+              <a:gd name="adj" fmla="val 5926"/>
+            </a:avLst>
+          </a:prstGeom>
+          <a:solidFill>
+            <a:srgbClr val="FFF8E1"/>
+          </a:solidFill>
+          <a:ln w="12700">
+            <a:solidFill>
+              <a:srgbClr val="FFF8E1"/>
+            </a:solidFill>
+            <a:prstDash val="solid"/>
+          </a:ln>
+        </p:spPr>
+      </p:sp>
+      <p:sp>
+        <p:nvSpPr>
+          <p:cNvPr id="8" name="Text 4"/>
+          <p:cNvSpPr/>
+          <p:nvPr/>
+        </p:nvSpPr>
+        <p:spPr>
+          <a:xfrm>
+            <a:off x="896112" y="4846320"/>
+            <a:ext cx="10378440" cy="1005840"/>
+          </a:xfrm>
+          <a:prstGeom prst="rect">
+            <a:avLst/>
+          </a:prstGeom>
+          <a:noFill/>
+          <a:ln/>
+        </p:spPr>
+        <p:txBody>
+          <a:bodyPr wrap="square" lIns="0" tIns="0" rIns="0" bIns="0" rtlCol="0" anchor="ctr"/>
+          <a:lstStyle/>
+          <a:p>
+            <a:pPr indent="0" marL="0">
+              <a:buNone/>
+            </a:pPr>
+            <a:r>
+              <a:rPr lang="en-US" sz="1300" dirty="0">
+                <a:solidFill>
+                  <a:srgbClr val="8A5A00"/>
+                </a:solidFill>
+                <a:latin typeface="Calibri" pitchFamily="34" charset="0"/>
+                <a:ea typeface="Calibri" pitchFamily="34" charset="-122"/>
+                <a:cs typeface="Calibri" pitchFamily="34" charset="-120"/>
+              </a:rPr>
+              <a:t>The registers that reproduced the measurement by letting the blade keep its tilt — the C−2 family — are exactly the ones needing the linker's C-arm to arrive through the C-tubule wall. +0/−2 is ruled out robustly; +1/−2 crosses the reachability boundary at −2.5° of protofilament anchor shift, i.e. inside the ±2° calibration noise, so it is at the edge of the possible rather than refuted.</a:t>
+            </a:r>
+            <a:endParaRPr lang="en-US" sz="1300" dirty="0"/>
+          </a:p>
+        </p:txBody>
+      </p:sp>
+      <p:sp>
+        <p:nvSpPr>
+          <p:cNvPr id="9" name="Text 5"/>
+          <p:cNvSpPr/>
+          <p:nvPr/>
+        </p:nvSpPr>
+        <p:spPr>
+          <a:xfrm>
+            <a:off x="640080" y="6035040"/>
+            <a:ext cx="10881360" cy="640080"/>
+          </a:xfrm>
+          <a:prstGeom prst="rect">
+            <a:avLst/>
+          </a:prstGeom>
+          <a:noFill/>
+          <a:ln/>
+        </p:spPr>
+        <p:txBody>
+          <a:bodyPr wrap="square" rtlCol="0" anchor="ctr"/>
+          <a:lstStyle/>
+          <a:p>
+            <a:pPr indent="0" marL="0">
+              <a:buNone/>
+            </a:pPr>
+            <a:r>
+              <a:rPr lang="en-US" sz="1250" dirty="0">
+                <a:solidFill>
+                  <a:srgbClr val="6B7280"/>
+                </a:solidFill>
+                <a:latin typeface="Calibri" pitchFamily="34" charset="0"/>
+                <a:ea typeface="Calibri" pitchFamily="34" charset="-122"/>
+                <a:cs typeface="Calibri" pitchFamily="34" charset="-120"/>
+              </a:rPr>
+              <a:t>TEST  cryo-ET the mutant: read the linker's protofilament and the blade tilt.   Tilt unchanged + linker shifted on C → the old mechanism, and the reachability check is wrong. Tilt rotated ~+14° with the linker shifted +2 on A → the corrected model. Tilt ~+13° at wild-type register → re-registering is not the explanation at all.</a:t>
+            </a:r>
+            <a:endParaRPr lang="en-US" sz="1250" dirty="0"/>
+          </a:p>
+        </p:txBody>
+      </p:sp>
+    </p:spTree>
+  </p:cSld>
+  <p:clrMapOvr>
+    <a:masterClrMapping/>
+  </p:clrMapOvr>
+</p:sld>
+</file>
+
+<file path=ppt/slides/slide8.xml><?xml version="1.0" encoding="utf-8"?>
+<p:sld xmlns:a="http://schemas.openxmlformats.org/drawingml/2006/main" xmlns:r="http://schemas.openxmlformats.org/officeDocument/2006/relationships" xmlns:p="http://schemas.openxmlformats.org/presentationml/2006/main">
+  <p:cSld name="Slide 8">
     <p:bg>
       <p:bgPr>
         <a:solidFill>
